--- a/docs/pptx/entire/ritu-entire-linsubhr-sens-akikdigo.pptx
+++ b/docs/pptx/entire/ritu-entire-linsubhr-sens-akikdigo.pptx
@@ -3045,612 +3045,612 @@
           </p:nvSpPr>
           <p:spPr>
             <a:xfrm>
-              <a:off x="1172049" y="2940021"/>
-              <a:ext cx="7090630" cy="2438777"/>
+              <a:off x="1172049" y="2929026"/>
+              <a:ext cx="7090630" cy="2450770"/>
             </a:xfrm>
             <a:custGeom>
               <a:avLst/>
               <a:pathLst>
-                <a:path w="7090630" h="2438777">
+                <a:path w="7090630" h="2450770">
                   <a:moveTo>
                     <a:pt x="0" y="0"/>
                   </a:moveTo>
                   <a:lnTo>
-                    <a:pt x="71622" y="70042"/>
-                  </a:lnTo>
-                  <a:lnTo>
-                    <a:pt x="143245" y="138211"/>
-                  </a:lnTo>
-                  <a:lnTo>
-                    <a:pt x="214867" y="204555"/>
-                  </a:lnTo>
-                  <a:lnTo>
-                    <a:pt x="286490" y="269123"/>
-                  </a:lnTo>
-                  <a:lnTo>
-                    <a:pt x="358112" y="331964"/>
-                  </a:lnTo>
-                  <a:lnTo>
-                    <a:pt x="429735" y="393122"/>
-                  </a:lnTo>
-                  <a:lnTo>
-                    <a:pt x="501357" y="452644"/>
-                  </a:lnTo>
-                  <a:lnTo>
-                    <a:pt x="572980" y="510574"/>
-                  </a:lnTo>
-                  <a:lnTo>
-                    <a:pt x="644602" y="566952"/>
-                  </a:lnTo>
-                  <a:lnTo>
-                    <a:pt x="716225" y="621822"/>
-                  </a:lnTo>
-                  <a:lnTo>
-                    <a:pt x="787847" y="675224"/>
-                  </a:lnTo>
-                  <a:lnTo>
-                    <a:pt x="859470" y="727196"/>
-                  </a:lnTo>
-                  <a:lnTo>
-                    <a:pt x="931092" y="777777"/>
-                  </a:lnTo>
-                  <a:lnTo>
-                    <a:pt x="1002715" y="827005"/>
-                  </a:lnTo>
-                  <a:lnTo>
-                    <a:pt x="1074337" y="874916"/>
-                  </a:lnTo>
-                  <a:lnTo>
-                    <a:pt x="1145960" y="921544"/>
-                  </a:lnTo>
-                  <a:lnTo>
-                    <a:pt x="1217582" y="966924"/>
-                  </a:lnTo>
-                  <a:lnTo>
-                    <a:pt x="1289205" y="1011090"/>
-                  </a:lnTo>
-                  <a:lnTo>
-                    <a:pt x="1360827" y="1054074"/>
-                  </a:lnTo>
-                  <a:lnTo>
-                    <a:pt x="1432450" y="1095907"/>
-                  </a:lnTo>
-                  <a:lnTo>
-                    <a:pt x="1504073" y="1136621"/>
-                  </a:lnTo>
-                  <a:lnTo>
-                    <a:pt x="1575695" y="1176245"/>
-                  </a:lnTo>
-                  <a:lnTo>
-                    <a:pt x="1647318" y="1214809"/>
-                  </a:lnTo>
-                  <a:lnTo>
-                    <a:pt x="1718940" y="1252341"/>
-                  </a:lnTo>
-                  <a:lnTo>
-                    <a:pt x="1790563" y="1288868"/>
-                  </a:lnTo>
-                  <a:lnTo>
-                    <a:pt x="1862185" y="1324418"/>
-                  </a:lnTo>
-                  <a:lnTo>
-                    <a:pt x="1933808" y="1359017"/>
-                  </a:lnTo>
-                  <a:lnTo>
-                    <a:pt x="2005430" y="1392689"/>
-                  </a:lnTo>
-                  <a:lnTo>
-                    <a:pt x="2077053" y="1425461"/>
-                  </a:lnTo>
-                  <a:lnTo>
-                    <a:pt x="2148675" y="1457355"/>
-                  </a:lnTo>
-                  <a:lnTo>
-                    <a:pt x="2220298" y="1488396"/>
-                  </a:lnTo>
-                  <a:lnTo>
-                    <a:pt x="2291920" y="1518606"/>
-                  </a:lnTo>
-                  <a:lnTo>
-                    <a:pt x="2363543" y="1548007"/>
-                  </a:lnTo>
-                  <a:lnTo>
-                    <a:pt x="2435165" y="1576622"/>
-                  </a:lnTo>
-                  <a:lnTo>
-                    <a:pt x="2506788" y="1604471"/>
-                  </a:lnTo>
-                  <a:lnTo>
-                    <a:pt x="2578410" y="1631575"/>
-                  </a:lnTo>
-                  <a:lnTo>
-                    <a:pt x="2650033" y="1657953"/>
-                  </a:lnTo>
-                  <a:lnTo>
-                    <a:pt x="2721655" y="1683625"/>
-                  </a:lnTo>
-                  <a:lnTo>
-                    <a:pt x="2793278" y="1708610"/>
-                  </a:lnTo>
-                  <a:lnTo>
-                    <a:pt x="2864901" y="1732927"/>
-                  </a:lnTo>
-                  <a:lnTo>
-                    <a:pt x="2936523" y="1756593"/>
-                  </a:lnTo>
-                  <a:lnTo>
-                    <a:pt x="3008146" y="1779625"/>
-                  </a:lnTo>
-                  <a:lnTo>
-                    <a:pt x="3079768" y="1790971"/>
-                  </a:lnTo>
-                  <a:lnTo>
-                    <a:pt x="3151391" y="1795957"/>
-                  </a:lnTo>
-                  <a:lnTo>
-                    <a:pt x="3223013" y="1800913"/>
-                  </a:lnTo>
-                  <a:lnTo>
-                    <a:pt x="3294636" y="1805839"/>
-                  </a:lnTo>
-                  <a:lnTo>
-                    <a:pt x="3366258" y="1810735"/>
-                  </a:lnTo>
-                  <a:lnTo>
-                    <a:pt x="3437881" y="1815602"/>
-                  </a:lnTo>
-                  <a:lnTo>
-                    <a:pt x="3509503" y="1820439"/>
-                  </a:lnTo>
-                  <a:lnTo>
-                    <a:pt x="3581126" y="1825247"/>
-                  </a:lnTo>
-                  <a:lnTo>
-                    <a:pt x="3652748" y="1830027"/>
-                  </a:lnTo>
-                  <a:lnTo>
-                    <a:pt x="3724371" y="1834777"/>
-                  </a:lnTo>
-                  <a:lnTo>
-                    <a:pt x="3795993" y="1839498"/>
-                  </a:lnTo>
-                  <a:lnTo>
-                    <a:pt x="3867616" y="1844192"/>
-                  </a:lnTo>
-                  <a:lnTo>
-                    <a:pt x="3939238" y="1848856"/>
-                  </a:lnTo>
-                  <a:lnTo>
-                    <a:pt x="4010861" y="1853493"/>
-                  </a:lnTo>
-                  <a:lnTo>
-                    <a:pt x="4082483" y="1858102"/>
-                  </a:lnTo>
-                  <a:lnTo>
-                    <a:pt x="4154106" y="1862683"/>
-                  </a:lnTo>
-                  <a:lnTo>
-                    <a:pt x="4225729" y="1867236"/>
-                  </a:lnTo>
-                  <a:lnTo>
-                    <a:pt x="4297351" y="1871762"/>
-                  </a:lnTo>
-                  <a:lnTo>
-                    <a:pt x="4368974" y="1876260"/>
-                  </a:lnTo>
-                  <a:lnTo>
-                    <a:pt x="4440596" y="1880731"/>
-                  </a:lnTo>
-                  <a:lnTo>
-                    <a:pt x="4512219" y="1885176"/>
-                  </a:lnTo>
-                  <a:lnTo>
-                    <a:pt x="4583841" y="1889593"/>
-                  </a:lnTo>
-                  <a:lnTo>
-                    <a:pt x="4655464" y="1893984"/>
-                  </a:lnTo>
-                  <a:lnTo>
-                    <a:pt x="4727086" y="1898348"/>
-                  </a:lnTo>
-                  <a:lnTo>
-                    <a:pt x="4798709" y="1902686"/>
-                  </a:lnTo>
-                  <a:lnTo>
-                    <a:pt x="4870331" y="1906998"/>
-                  </a:lnTo>
-                  <a:lnTo>
-                    <a:pt x="4941954" y="1911284"/>
-                  </a:lnTo>
-                  <a:lnTo>
-                    <a:pt x="5013576" y="1915544"/>
-                  </a:lnTo>
-                  <a:lnTo>
-                    <a:pt x="5085199" y="1919778"/>
-                  </a:lnTo>
-                  <a:lnTo>
-                    <a:pt x="5156821" y="1923987"/>
-                  </a:lnTo>
-                  <a:lnTo>
-                    <a:pt x="5228444" y="1928170"/>
-                  </a:lnTo>
-                  <a:lnTo>
-                    <a:pt x="5300066" y="1932328"/>
-                  </a:lnTo>
-                  <a:lnTo>
-                    <a:pt x="5371689" y="1936461"/>
-                  </a:lnTo>
-                  <a:lnTo>
-                    <a:pt x="5443311" y="1940569"/>
-                  </a:lnTo>
-                  <a:lnTo>
-                    <a:pt x="5514934" y="1944652"/>
-                  </a:lnTo>
-                  <a:lnTo>
-                    <a:pt x="5586557" y="1948711"/>
-                  </a:lnTo>
-                  <a:lnTo>
-                    <a:pt x="5658179" y="1952745"/>
-                  </a:lnTo>
-                  <a:lnTo>
-                    <a:pt x="5729802" y="1956755"/>
-                  </a:lnTo>
-                  <a:lnTo>
-                    <a:pt x="5801424" y="1960740"/>
-                  </a:lnTo>
-                  <a:lnTo>
-                    <a:pt x="5873047" y="1964702"/>
-                  </a:lnTo>
-                  <a:lnTo>
-                    <a:pt x="5944669" y="1968639"/>
-                  </a:lnTo>
-                  <a:lnTo>
-                    <a:pt x="6016292" y="1972553"/>
-                  </a:lnTo>
-                  <a:lnTo>
-                    <a:pt x="6087914" y="1976444"/>
-                  </a:lnTo>
-                  <a:lnTo>
-                    <a:pt x="6159537" y="1980310"/>
-                  </a:lnTo>
-                  <a:lnTo>
-                    <a:pt x="6231159" y="1984154"/>
-                  </a:lnTo>
-                  <a:lnTo>
-                    <a:pt x="6302782" y="1987974"/>
-                  </a:lnTo>
-                  <a:lnTo>
-                    <a:pt x="6374404" y="1991771"/>
-                  </a:lnTo>
-                  <a:lnTo>
-                    <a:pt x="6446027" y="1995545"/>
-                  </a:lnTo>
-                  <a:lnTo>
-                    <a:pt x="6517649" y="1999297"/>
-                  </a:lnTo>
-                  <a:lnTo>
-                    <a:pt x="6589272" y="2003026"/>
-                  </a:lnTo>
-                  <a:lnTo>
-                    <a:pt x="6660894" y="2006732"/>
-                  </a:lnTo>
-                  <a:lnTo>
-                    <a:pt x="6732517" y="2010416"/>
-                  </a:lnTo>
-                  <a:lnTo>
-                    <a:pt x="6804139" y="2014078"/>
-                  </a:lnTo>
-                  <a:lnTo>
-                    <a:pt x="6875762" y="2017717"/>
-                  </a:lnTo>
-                  <a:lnTo>
-                    <a:pt x="6947385" y="2021335"/>
-                  </a:lnTo>
-                  <a:lnTo>
-                    <a:pt x="7019007" y="2024931"/>
-                  </a:lnTo>
-                  <a:lnTo>
-                    <a:pt x="7090630" y="2028505"/>
-                  </a:lnTo>
-                  <a:lnTo>
-                    <a:pt x="7090630" y="2438777"/>
-                  </a:lnTo>
-                  <a:lnTo>
-                    <a:pt x="7019007" y="2433870"/>
-                  </a:lnTo>
-                  <a:lnTo>
-                    <a:pt x="6947385" y="2428828"/>
-                  </a:lnTo>
-                  <a:lnTo>
-                    <a:pt x="6875762" y="2423647"/>
-                  </a:lnTo>
-                  <a:lnTo>
-                    <a:pt x="6804139" y="2418324"/>
-                  </a:lnTo>
-                  <a:lnTo>
-                    <a:pt x="6732517" y="2412855"/>
-                  </a:lnTo>
-                  <a:lnTo>
-                    <a:pt x="6660894" y="2407235"/>
-                  </a:lnTo>
-                  <a:lnTo>
-                    <a:pt x="6589272" y="2401460"/>
-                  </a:lnTo>
-                  <a:lnTo>
-                    <a:pt x="6517649" y="2395527"/>
-                  </a:lnTo>
-                  <a:lnTo>
-                    <a:pt x="6446027" y="2389431"/>
-                  </a:lnTo>
-                  <a:lnTo>
-                    <a:pt x="6374404" y="2383167"/>
-                  </a:lnTo>
-                  <a:lnTo>
-                    <a:pt x="6302782" y="2376731"/>
-                  </a:lnTo>
-                  <a:lnTo>
-                    <a:pt x="6231159" y="2370117"/>
-                  </a:lnTo>
-                  <a:lnTo>
-                    <a:pt x="6159537" y="2363322"/>
-                  </a:lnTo>
-                  <a:lnTo>
-                    <a:pt x="6087914" y="2356340"/>
-                  </a:lnTo>
-                  <a:lnTo>
-                    <a:pt x="6016292" y="2349166"/>
-                  </a:lnTo>
-                  <a:lnTo>
-                    <a:pt x="5944669" y="2341795"/>
-                  </a:lnTo>
-                  <a:lnTo>
-                    <a:pt x="5873047" y="2334221"/>
-                  </a:lnTo>
-                  <a:lnTo>
-                    <a:pt x="5801424" y="2326439"/>
-                  </a:lnTo>
-                  <a:lnTo>
-                    <a:pt x="5729802" y="2318443"/>
-                  </a:lnTo>
-                  <a:lnTo>
-                    <a:pt x="5658179" y="2310227"/>
-                  </a:lnTo>
-                  <a:lnTo>
-                    <a:pt x="5586557" y="2301785"/>
-                  </a:lnTo>
-                  <a:lnTo>
-                    <a:pt x="5514934" y="2293111"/>
-                  </a:lnTo>
-                  <a:lnTo>
-                    <a:pt x="5443311" y="2284198"/>
-                  </a:lnTo>
-                  <a:lnTo>
-                    <a:pt x="5371689" y="2275041"/>
-                  </a:lnTo>
-                  <a:lnTo>
-                    <a:pt x="5300066" y="2265631"/>
-                  </a:lnTo>
-                  <a:lnTo>
-                    <a:pt x="5228444" y="2255963"/>
-                  </a:lnTo>
-                  <a:lnTo>
-                    <a:pt x="5156821" y="2246029"/>
-                  </a:lnTo>
-                  <a:lnTo>
-                    <a:pt x="5085199" y="2235822"/>
-                  </a:lnTo>
-                  <a:lnTo>
-                    <a:pt x="5013576" y="2225334"/>
-                  </a:lnTo>
-                  <a:lnTo>
-                    <a:pt x="4941954" y="2214557"/>
-                  </a:lnTo>
-                  <a:lnTo>
-                    <a:pt x="4870331" y="2203485"/>
-                  </a:lnTo>
-                  <a:lnTo>
-                    <a:pt x="4798709" y="2192107"/>
-                  </a:lnTo>
-                  <a:lnTo>
-                    <a:pt x="4727086" y="2180417"/>
-                  </a:lnTo>
-                  <a:lnTo>
-                    <a:pt x="4655464" y="2168406"/>
-                  </a:lnTo>
-                  <a:lnTo>
-                    <a:pt x="4583841" y="2156064"/>
-                  </a:lnTo>
-                  <a:lnTo>
-                    <a:pt x="4512219" y="2143383"/>
-                  </a:lnTo>
-                  <a:lnTo>
-                    <a:pt x="4440596" y="2130353"/>
-                  </a:lnTo>
-                  <a:lnTo>
-                    <a:pt x="4368974" y="2116965"/>
-                  </a:lnTo>
-                  <a:lnTo>
-                    <a:pt x="4297351" y="2103209"/>
-                  </a:lnTo>
-                  <a:lnTo>
-                    <a:pt x="4225729" y="2089074"/>
-                  </a:lnTo>
-                  <a:lnTo>
-                    <a:pt x="4154106" y="2074551"/>
-                  </a:lnTo>
-                  <a:lnTo>
-                    <a:pt x="4082483" y="2059628"/>
-                  </a:lnTo>
-                  <a:lnTo>
-                    <a:pt x="4010861" y="2044295"/>
-                  </a:lnTo>
-                  <a:lnTo>
-                    <a:pt x="3939238" y="2028541"/>
-                  </a:lnTo>
-                  <a:lnTo>
-                    <a:pt x="3867616" y="2012353"/>
-                  </a:lnTo>
-                  <a:lnTo>
-                    <a:pt x="3795993" y="1995720"/>
-                  </a:lnTo>
-                  <a:lnTo>
-                    <a:pt x="3724371" y="1978630"/>
-                  </a:lnTo>
-                  <a:lnTo>
-                    <a:pt x="3652748" y="1961070"/>
-                  </a:lnTo>
-                  <a:lnTo>
-                    <a:pt x="3581126" y="1943027"/>
-                  </a:lnTo>
-                  <a:lnTo>
-                    <a:pt x="3509503" y="1924487"/>
-                  </a:lnTo>
-                  <a:lnTo>
-                    <a:pt x="3437881" y="1905438"/>
-                  </a:lnTo>
-                  <a:lnTo>
-                    <a:pt x="3366258" y="1885865"/>
-                  </a:lnTo>
-                  <a:lnTo>
-                    <a:pt x="3294636" y="1865754"/>
-                  </a:lnTo>
-                  <a:lnTo>
-                    <a:pt x="3223013" y="1845090"/>
-                  </a:lnTo>
-                  <a:lnTo>
-                    <a:pt x="3151391" y="1823858"/>
-                  </a:lnTo>
-                  <a:lnTo>
-                    <a:pt x="3079768" y="1802042"/>
-                  </a:lnTo>
-                  <a:lnTo>
-                    <a:pt x="3008146" y="1785955"/>
-                  </a:lnTo>
-                  <a:lnTo>
-                    <a:pt x="2936523" y="1780908"/>
-                  </a:lnTo>
-                  <a:lnTo>
-                    <a:pt x="2864901" y="1775831"/>
-                  </a:lnTo>
-                  <a:lnTo>
-                    <a:pt x="2793278" y="1770723"/>
-                  </a:lnTo>
-                  <a:lnTo>
-                    <a:pt x="2721655" y="1765584"/>
-                  </a:lnTo>
-                  <a:lnTo>
-                    <a:pt x="2650033" y="1760413"/>
-                  </a:lnTo>
-                  <a:lnTo>
-                    <a:pt x="2578410" y="1755212"/>
-                  </a:lnTo>
-                  <a:lnTo>
-                    <a:pt x="2506788" y="1749978"/>
-                  </a:lnTo>
-                  <a:lnTo>
-                    <a:pt x="2435165" y="1744713"/>
-                  </a:lnTo>
-                  <a:lnTo>
-                    <a:pt x="2363543" y="1739416"/>
-                  </a:lnTo>
-                  <a:lnTo>
-                    <a:pt x="2291920" y="1734087"/>
-                  </a:lnTo>
-                  <a:lnTo>
-                    <a:pt x="2220298" y="1728725"/>
-                  </a:lnTo>
-                  <a:lnTo>
-                    <a:pt x="2148675" y="1723331"/>
-                  </a:lnTo>
-                  <a:lnTo>
-                    <a:pt x="2077053" y="1717904"/>
-                  </a:lnTo>
-                  <a:lnTo>
-                    <a:pt x="2005430" y="1712444"/>
-                  </a:lnTo>
-                  <a:lnTo>
-                    <a:pt x="1933808" y="1706952"/>
-                  </a:lnTo>
-                  <a:lnTo>
-                    <a:pt x="1862185" y="1701425"/>
-                  </a:lnTo>
-                  <a:lnTo>
-                    <a:pt x="1790563" y="1695865"/>
-                  </a:lnTo>
-                  <a:lnTo>
-                    <a:pt x="1718940" y="1690272"/>
-                  </a:lnTo>
-                  <a:lnTo>
-                    <a:pt x="1647318" y="1684644"/>
-                  </a:lnTo>
-                  <a:lnTo>
-                    <a:pt x="1575695" y="1678982"/>
-                  </a:lnTo>
-                  <a:lnTo>
-                    <a:pt x="1504073" y="1673286"/>
-                  </a:lnTo>
-                  <a:lnTo>
-                    <a:pt x="1432450" y="1667556"/>
-                  </a:lnTo>
-                  <a:lnTo>
-                    <a:pt x="1360827" y="1661790"/>
-                  </a:lnTo>
-                  <a:lnTo>
-                    <a:pt x="1289205" y="1655990"/>
-                  </a:lnTo>
-                  <a:lnTo>
-                    <a:pt x="1217582" y="1650154"/>
-                  </a:lnTo>
-                  <a:lnTo>
-                    <a:pt x="1145960" y="1644283"/>
-                  </a:lnTo>
-                  <a:lnTo>
-                    <a:pt x="1074337" y="1638376"/>
-                  </a:lnTo>
-                  <a:lnTo>
-                    <a:pt x="1002715" y="1632433"/>
-                  </a:lnTo>
-                  <a:lnTo>
-                    <a:pt x="931092" y="1626455"/>
-                  </a:lnTo>
-                  <a:lnTo>
-                    <a:pt x="859470" y="1620440"/>
-                  </a:lnTo>
-                  <a:lnTo>
-                    <a:pt x="787847" y="1614388"/>
-                  </a:lnTo>
-                  <a:lnTo>
-                    <a:pt x="716225" y="1608300"/>
-                  </a:lnTo>
-                  <a:lnTo>
-                    <a:pt x="644602" y="1602175"/>
-                  </a:lnTo>
-                  <a:lnTo>
-                    <a:pt x="572980" y="1596012"/>
-                  </a:lnTo>
-                  <a:lnTo>
-                    <a:pt x="501357" y="1589812"/>
-                  </a:lnTo>
-                  <a:lnTo>
-                    <a:pt x="429735" y="1583575"/>
-                  </a:lnTo>
-                  <a:lnTo>
-                    <a:pt x="358112" y="1577299"/>
-                  </a:lnTo>
-                  <a:lnTo>
-                    <a:pt x="286490" y="1570986"/>
-                  </a:lnTo>
-                  <a:lnTo>
-                    <a:pt x="214867" y="1564634"/>
-                  </a:lnTo>
-                  <a:lnTo>
-                    <a:pt x="143245" y="1558244"/>
-                  </a:lnTo>
-                  <a:lnTo>
-                    <a:pt x="71622" y="1551815"/>
-                  </a:lnTo>
-                  <a:lnTo>
-                    <a:pt x="0" y="1545347"/>
+                    <a:pt x="71622" y="70590"/>
+                  </a:lnTo>
+                  <a:lnTo>
+                    <a:pt x="143245" y="139284"/>
+                  </a:lnTo>
+                  <a:lnTo>
+                    <a:pt x="214867" y="206133"/>
+                  </a:lnTo>
+                  <a:lnTo>
+                    <a:pt x="286490" y="271187"/>
+                  </a:lnTo>
+                  <a:lnTo>
+                    <a:pt x="358112" y="334494"/>
+                  </a:lnTo>
+                  <a:lnTo>
+                    <a:pt x="429735" y="396100"/>
+                  </a:lnTo>
+                  <a:lnTo>
+                    <a:pt x="501357" y="456051"/>
+                  </a:lnTo>
+                  <a:lnTo>
+                    <a:pt x="572980" y="514393"/>
+                  </a:lnTo>
+                  <a:lnTo>
+                    <a:pt x="644602" y="571167"/>
+                  </a:lnTo>
+                  <a:lnTo>
+                    <a:pt x="716225" y="626417"/>
+                  </a:lnTo>
+                  <a:lnTo>
+                    <a:pt x="787847" y="680182"/>
+                  </a:lnTo>
+                  <a:lnTo>
+                    <a:pt x="859470" y="732504"/>
+                  </a:lnTo>
+                  <a:lnTo>
+                    <a:pt x="931092" y="783420"/>
+                  </a:lnTo>
+                  <a:lnTo>
+                    <a:pt x="1002715" y="832969"/>
+                  </a:lnTo>
+                  <a:lnTo>
+                    <a:pt x="1074337" y="881187"/>
+                  </a:lnTo>
+                  <a:lnTo>
+                    <a:pt x="1145960" y="928109"/>
+                  </a:lnTo>
+                  <a:lnTo>
+                    <a:pt x="1217582" y="973772"/>
+                  </a:lnTo>
+                  <a:lnTo>
+                    <a:pt x="1289205" y="1018208"/>
+                  </a:lnTo>
+                  <a:lnTo>
+                    <a:pt x="1360827" y="1061451"/>
+                  </a:lnTo>
+                  <a:lnTo>
+                    <a:pt x="1432450" y="1103532"/>
+                  </a:lnTo>
+                  <a:lnTo>
+                    <a:pt x="1504073" y="1144483"/>
+                  </a:lnTo>
+                  <a:lnTo>
+                    <a:pt x="1575695" y="1184334"/>
+                  </a:lnTo>
+                  <a:lnTo>
+                    <a:pt x="1647318" y="1223115"/>
+                  </a:lnTo>
+                  <a:lnTo>
+                    <a:pt x="1718940" y="1260854"/>
+                  </a:lnTo>
+                  <a:lnTo>
+                    <a:pt x="1790563" y="1297579"/>
+                  </a:lnTo>
+                  <a:lnTo>
+                    <a:pt x="1862185" y="1333319"/>
+                  </a:lnTo>
+                  <a:lnTo>
+                    <a:pt x="1933808" y="1368098"/>
+                  </a:lnTo>
+                  <a:lnTo>
+                    <a:pt x="2005430" y="1401943"/>
+                  </a:lnTo>
+                  <a:lnTo>
+                    <a:pt x="2077053" y="1434879"/>
+                  </a:lnTo>
+                  <a:lnTo>
+                    <a:pt x="2148675" y="1466930"/>
+                  </a:lnTo>
+                  <a:lnTo>
+                    <a:pt x="2220298" y="1498121"/>
+                  </a:lnTo>
+                  <a:lnTo>
+                    <a:pt x="2291920" y="1528474"/>
+                  </a:lnTo>
+                  <a:lnTo>
+                    <a:pt x="2363543" y="1558012"/>
+                  </a:lnTo>
+                  <a:lnTo>
+                    <a:pt x="2435165" y="1586756"/>
+                  </a:lnTo>
+                  <a:lnTo>
+                    <a:pt x="2506788" y="1614728"/>
+                  </a:lnTo>
+                  <a:lnTo>
+                    <a:pt x="2578410" y="1641949"/>
+                  </a:lnTo>
+                  <a:lnTo>
+                    <a:pt x="2650033" y="1668439"/>
+                  </a:lnTo>
+                  <a:lnTo>
+                    <a:pt x="2721655" y="1694217"/>
+                  </a:lnTo>
+                  <a:lnTo>
+                    <a:pt x="2793278" y="1719303"/>
+                  </a:lnTo>
+                  <a:lnTo>
+                    <a:pt x="2864901" y="1743716"/>
+                  </a:lnTo>
+                  <a:lnTo>
+                    <a:pt x="2936523" y="1767472"/>
+                  </a:lnTo>
+                  <a:lnTo>
+                    <a:pt x="3008146" y="1790591"/>
+                  </a:lnTo>
+                  <a:lnTo>
+                    <a:pt x="3079768" y="1802054"/>
+                  </a:lnTo>
+                  <a:lnTo>
+                    <a:pt x="3151391" y="1807176"/>
+                  </a:lnTo>
+                  <a:lnTo>
+                    <a:pt x="3223013" y="1812266"/>
+                  </a:lnTo>
+                  <a:lnTo>
+                    <a:pt x="3294636" y="1817324"/>
+                  </a:lnTo>
+                  <a:lnTo>
+                    <a:pt x="3366258" y="1822351"/>
+                  </a:lnTo>
+                  <a:lnTo>
+                    <a:pt x="3437881" y="1827347"/>
+                  </a:lnTo>
+                  <a:lnTo>
+                    <a:pt x="3509503" y="1832312"/>
+                  </a:lnTo>
+                  <a:lnTo>
+                    <a:pt x="3581126" y="1837246"/>
+                  </a:lnTo>
+                  <a:lnTo>
+                    <a:pt x="3652748" y="1842150"/>
+                  </a:lnTo>
+                  <a:lnTo>
+                    <a:pt x="3724371" y="1847023"/>
+                  </a:lnTo>
+                  <a:lnTo>
+                    <a:pt x="3795993" y="1851866"/>
+                  </a:lnTo>
+                  <a:lnTo>
+                    <a:pt x="3867616" y="1856679"/>
+                  </a:lnTo>
+                  <a:lnTo>
+                    <a:pt x="3939238" y="1861462"/>
+                  </a:lnTo>
+                  <a:lnTo>
+                    <a:pt x="4010861" y="1866215"/>
+                  </a:lnTo>
+                  <a:lnTo>
+                    <a:pt x="4082483" y="1870939"/>
+                  </a:lnTo>
+                  <a:lnTo>
+                    <a:pt x="4154106" y="1875634"/>
+                  </a:lnTo>
+                  <a:lnTo>
+                    <a:pt x="4225729" y="1880300"/>
+                  </a:lnTo>
+                  <a:lnTo>
+                    <a:pt x="4297351" y="1884936"/>
+                  </a:lnTo>
+                  <a:lnTo>
+                    <a:pt x="4368974" y="1889544"/>
+                  </a:lnTo>
+                  <a:lnTo>
+                    <a:pt x="4440596" y="1894124"/>
+                  </a:lnTo>
+                  <a:lnTo>
+                    <a:pt x="4512219" y="1898675"/>
+                  </a:lnTo>
+                  <a:lnTo>
+                    <a:pt x="4583841" y="1903197"/>
+                  </a:lnTo>
+                  <a:lnTo>
+                    <a:pt x="4655464" y="1907692"/>
+                  </a:lnTo>
+                  <a:lnTo>
+                    <a:pt x="4727086" y="1912159"/>
+                  </a:lnTo>
+                  <a:lnTo>
+                    <a:pt x="4798709" y="1916598"/>
+                  </a:lnTo>
+                  <a:lnTo>
+                    <a:pt x="4870331" y="1921010"/>
+                  </a:lnTo>
+                  <a:lnTo>
+                    <a:pt x="4941954" y="1925394"/>
+                  </a:lnTo>
+                  <a:lnTo>
+                    <a:pt x="5013576" y="1929751"/>
+                  </a:lnTo>
+                  <a:lnTo>
+                    <a:pt x="5085199" y="1934081"/>
+                  </a:lnTo>
+                  <a:lnTo>
+                    <a:pt x="5156821" y="1938384"/>
+                  </a:lnTo>
+                  <a:lnTo>
+                    <a:pt x="5228444" y="1942661"/>
+                  </a:lnTo>
+                  <a:lnTo>
+                    <a:pt x="5300066" y="1946911"/>
+                  </a:lnTo>
+                  <a:lnTo>
+                    <a:pt x="5371689" y="1951135"/>
+                  </a:lnTo>
+                  <a:lnTo>
+                    <a:pt x="5443311" y="1955332"/>
+                  </a:lnTo>
+                  <a:lnTo>
+                    <a:pt x="5514934" y="1959504"/>
+                  </a:lnTo>
+                  <a:lnTo>
+                    <a:pt x="5586557" y="1963649"/>
+                  </a:lnTo>
+                  <a:lnTo>
+                    <a:pt x="5658179" y="1967769"/>
+                  </a:lnTo>
+                  <a:lnTo>
+                    <a:pt x="5729802" y="1971864"/>
+                  </a:lnTo>
+                  <a:lnTo>
+                    <a:pt x="5801424" y="1975933"/>
+                  </a:lnTo>
+                  <a:lnTo>
+                    <a:pt x="5873047" y="1979976"/>
+                  </a:lnTo>
+                  <a:lnTo>
+                    <a:pt x="5944669" y="1983995"/>
+                  </a:lnTo>
+                  <a:lnTo>
+                    <a:pt x="6016292" y="1987989"/>
+                  </a:lnTo>
+                  <a:lnTo>
+                    <a:pt x="6087914" y="1991958"/>
+                  </a:lnTo>
+                  <a:lnTo>
+                    <a:pt x="6159537" y="1995902"/>
+                  </a:lnTo>
+                  <a:lnTo>
+                    <a:pt x="6231159" y="1999822"/>
+                  </a:lnTo>
+                  <a:lnTo>
+                    <a:pt x="6302782" y="2003718"/>
+                  </a:lnTo>
+                  <a:lnTo>
+                    <a:pt x="6374404" y="2007590"/>
+                  </a:lnTo>
+                  <a:lnTo>
+                    <a:pt x="6446027" y="2011437"/>
+                  </a:lnTo>
+                  <a:lnTo>
+                    <a:pt x="6517649" y="2015261"/>
+                  </a:lnTo>
+                  <a:lnTo>
+                    <a:pt x="6589272" y="2019061"/>
+                  </a:lnTo>
+                  <a:lnTo>
+                    <a:pt x="6660894" y="2022837"/>
+                  </a:lnTo>
+                  <a:lnTo>
+                    <a:pt x="6732517" y="2026590"/>
+                  </a:lnTo>
+                  <a:lnTo>
+                    <a:pt x="6804139" y="2030320"/>
+                  </a:lnTo>
+                  <a:lnTo>
+                    <a:pt x="6875762" y="2034027"/>
+                  </a:lnTo>
+                  <a:lnTo>
+                    <a:pt x="6947385" y="2037710"/>
+                  </a:lnTo>
+                  <a:lnTo>
+                    <a:pt x="7019007" y="2041371"/>
+                  </a:lnTo>
+                  <a:lnTo>
+                    <a:pt x="7090630" y="2045009"/>
+                  </a:lnTo>
+                  <a:lnTo>
+                    <a:pt x="7090630" y="2450770"/>
+                  </a:lnTo>
+                  <a:lnTo>
+                    <a:pt x="7019007" y="2445872"/>
+                  </a:lnTo>
+                  <a:lnTo>
+                    <a:pt x="6947385" y="2440839"/>
+                  </a:lnTo>
+                  <a:lnTo>
+                    <a:pt x="6875762" y="2435667"/>
+                  </a:lnTo>
+                  <a:lnTo>
+                    <a:pt x="6804139" y="2430353"/>
+                  </a:lnTo>
+                  <a:lnTo>
+                    <a:pt x="6732517" y="2424892"/>
+                  </a:lnTo>
+                  <a:lnTo>
+                    <a:pt x="6660894" y="2419280"/>
+                  </a:lnTo>
+                  <a:lnTo>
+                    <a:pt x="6589272" y="2413513"/>
+                  </a:lnTo>
+                  <a:lnTo>
+                    <a:pt x="6517649" y="2407587"/>
+                  </a:lnTo>
+                  <a:lnTo>
+                    <a:pt x="6446027" y="2401497"/>
+                  </a:lnTo>
+                  <a:lnTo>
+                    <a:pt x="6374404" y="2395240"/>
+                  </a:lnTo>
+                  <a:lnTo>
+                    <a:pt x="6302782" y="2388810"/>
+                  </a:lnTo>
+                  <a:lnTo>
+                    <a:pt x="6231159" y="2382202"/>
+                  </a:lnTo>
+                  <a:lnTo>
+                    <a:pt x="6159537" y="2375412"/>
+                  </a:lnTo>
+                  <a:lnTo>
+                    <a:pt x="6087914" y="2368434"/>
+                  </a:lnTo>
+                  <a:lnTo>
+                    <a:pt x="6016292" y="2361264"/>
+                  </a:lnTo>
+                  <a:lnTo>
+                    <a:pt x="5944669" y="2353896"/>
+                  </a:lnTo>
+                  <a:lnTo>
+                    <a:pt x="5873047" y="2346325"/>
+                  </a:lnTo>
+                  <a:lnTo>
+                    <a:pt x="5801424" y="2338544"/>
+                  </a:lnTo>
+                  <a:lnTo>
+                    <a:pt x="5729802" y="2330549"/>
+                  </a:lnTo>
+                  <a:lnTo>
+                    <a:pt x="5658179" y="2322333"/>
+                  </a:lnTo>
+                  <a:lnTo>
+                    <a:pt x="5586557" y="2313891"/>
+                  </a:lnTo>
+                  <a:lnTo>
+                    <a:pt x="5514934" y="2305215"/>
+                  </a:lnTo>
+                  <a:lnTo>
+                    <a:pt x="5443311" y="2296300"/>
+                  </a:lnTo>
+                  <a:lnTo>
+                    <a:pt x="5371689" y="2287139"/>
+                  </a:lnTo>
+                  <a:lnTo>
+                    <a:pt x="5300066" y="2277726"/>
+                  </a:lnTo>
+                  <a:lnTo>
+                    <a:pt x="5228444" y="2268052"/>
+                  </a:lnTo>
+                  <a:lnTo>
+                    <a:pt x="5156821" y="2258111"/>
+                  </a:lnTo>
+                  <a:lnTo>
+                    <a:pt x="5085199" y="2247896"/>
+                  </a:lnTo>
+                  <a:lnTo>
+                    <a:pt x="5013576" y="2237399"/>
+                  </a:lnTo>
+                  <a:lnTo>
+                    <a:pt x="4941954" y="2226613"/>
+                  </a:lnTo>
+                  <a:lnTo>
+                    <a:pt x="4870331" y="2215528"/>
+                  </a:lnTo>
+                  <a:lnTo>
+                    <a:pt x="4798709" y="2204138"/>
+                  </a:lnTo>
+                  <a:lnTo>
+                    <a:pt x="4727086" y="2192433"/>
+                  </a:lnTo>
+                  <a:lnTo>
+                    <a:pt x="4655464" y="2180406"/>
+                  </a:lnTo>
+                  <a:lnTo>
+                    <a:pt x="4583841" y="2168046"/>
+                  </a:lnTo>
+                  <a:lnTo>
+                    <a:pt x="4512219" y="2155345"/>
+                  </a:lnTo>
+                  <a:lnTo>
+                    <a:pt x="4440596" y="2142294"/>
+                  </a:lnTo>
+                  <a:lnTo>
+                    <a:pt x="4368974" y="2128882"/>
+                  </a:lnTo>
+                  <a:lnTo>
+                    <a:pt x="4297351" y="2115101"/>
+                  </a:lnTo>
+                  <a:lnTo>
+                    <a:pt x="4225729" y="2100938"/>
+                  </a:lnTo>
+                  <a:lnTo>
+                    <a:pt x="4154106" y="2086385"/>
+                  </a:lnTo>
+                  <a:lnTo>
+                    <a:pt x="4082483" y="2071431"/>
+                  </a:lnTo>
+                  <a:lnTo>
+                    <a:pt x="4010861" y="2056064"/>
+                  </a:lnTo>
+                  <a:lnTo>
+                    <a:pt x="3939238" y="2040272"/>
+                  </a:lnTo>
+                  <a:lnTo>
+                    <a:pt x="3867616" y="2024045"/>
+                  </a:lnTo>
+                  <a:lnTo>
+                    <a:pt x="3795993" y="2007369"/>
+                  </a:lnTo>
+                  <a:lnTo>
+                    <a:pt x="3724371" y="1990234"/>
+                  </a:lnTo>
+                  <a:lnTo>
+                    <a:pt x="3652748" y="1972626"/>
+                  </a:lnTo>
+                  <a:lnTo>
+                    <a:pt x="3581126" y="1954531"/>
+                  </a:lnTo>
+                  <a:lnTo>
+                    <a:pt x="3509503" y="1935937"/>
+                  </a:lnTo>
+                  <a:lnTo>
+                    <a:pt x="3437881" y="1916831"/>
+                  </a:lnTo>
+                  <a:lnTo>
+                    <a:pt x="3366258" y="1897196"/>
+                  </a:lnTo>
+                  <a:lnTo>
+                    <a:pt x="3294636" y="1877020"/>
+                  </a:lnTo>
+                  <a:lnTo>
+                    <a:pt x="3223013" y="1856287"/>
+                  </a:lnTo>
+                  <a:lnTo>
+                    <a:pt x="3151391" y="1834982"/>
+                  </a:lnTo>
+                  <a:lnTo>
+                    <a:pt x="3079768" y="1813088"/>
+                  </a:lnTo>
+                  <a:lnTo>
+                    <a:pt x="3008146" y="1796900"/>
+                  </a:lnTo>
+                  <a:lnTo>
+                    <a:pt x="2936523" y="1791715"/>
+                  </a:lnTo>
+                  <a:lnTo>
+                    <a:pt x="2864901" y="1786496"/>
+                  </a:lnTo>
+                  <a:lnTo>
+                    <a:pt x="2793278" y="1781246"/>
+                  </a:lnTo>
+                  <a:lnTo>
+                    <a:pt x="2721655" y="1775962"/>
+                  </a:lnTo>
+                  <a:lnTo>
+                    <a:pt x="2650033" y="1770646"/>
+                  </a:lnTo>
+                  <a:lnTo>
+                    <a:pt x="2578410" y="1765296"/>
+                  </a:lnTo>
+                  <a:lnTo>
+                    <a:pt x="2506788" y="1759913"/>
+                  </a:lnTo>
+                  <a:lnTo>
+                    <a:pt x="2435165" y="1754497"/>
+                  </a:lnTo>
+                  <a:lnTo>
+                    <a:pt x="2363543" y="1749046"/>
+                  </a:lnTo>
+                  <a:lnTo>
+                    <a:pt x="2291920" y="1743562"/>
+                  </a:lnTo>
+                  <a:lnTo>
+                    <a:pt x="2220298" y="1738043"/>
+                  </a:lnTo>
+                  <a:lnTo>
+                    <a:pt x="2148675" y="1732490"/>
+                  </a:lnTo>
+                  <a:lnTo>
+                    <a:pt x="2077053" y="1726903"/>
+                  </a:lnTo>
+                  <a:lnTo>
+                    <a:pt x="2005430" y="1721280"/>
+                  </a:lnTo>
+                  <a:lnTo>
+                    <a:pt x="1933808" y="1715623"/>
+                  </a:lnTo>
+                  <a:lnTo>
+                    <a:pt x="1862185" y="1709930"/>
+                  </a:lnTo>
+                  <a:lnTo>
+                    <a:pt x="1790563" y="1704202"/>
+                  </a:lnTo>
+                  <a:lnTo>
+                    <a:pt x="1718940" y="1698438"/>
+                  </a:lnTo>
+                  <a:lnTo>
+                    <a:pt x="1647318" y="1692638"/>
+                  </a:lnTo>
+                  <a:lnTo>
+                    <a:pt x="1575695" y="1686801"/>
+                  </a:lnTo>
+                  <a:lnTo>
+                    <a:pt x="1504073" y="1680929"/>
+                  </a:lnTo>
+                  <a:lnTo>
+                    <a:pt x="1432450" y="1675019"/>
+                  </a:lnTo>
+                  <a:lnTo>
+                    <a:pt x="1360827" y="1669073"/>
+                  </a:lnTo>
+                  <a:lnTo>
+                    <a:pt x="1289205" y="1663090"/>
+                  </a:lnTo>
+                  <a:lnTo>
+                    <a:pt x="1217582" y="1657070"/>
+                  </a:lnTo>
+                  <a:lnTo>
+                    <a:pt x="1145960" y="1651011"/>
+                  </a:lnTo>
+                  <a:lnTo>
+                    <a:pt x="1074337" y="1644916"/>
+                  </a:lnTo>
+                  <a:lnTo>
+                    <a:pt x="1002715" y="1638782"/>
+                  </a:lnTo>
+                  <a:lnTo>
+                    <a:pt x="931092" y="1632609"/>
+                  </a:lnTo>
+                  <a:lnTo>
+                    <a:pt x="859470" y="1626399"/>
+                  </a:lnTo>
+                  <a:lnTo>
+                    <a:pt x="787847" y="1620149"/>
+                  </a:lnTo>
+                  <a:lnTo>
+                    <a:pt x="716225" y="1613861"/>
+                  </a:lnTo>
+                  <a:lnTo>
+                    <a:pt x="644602" y="1607533"/>
+                  </a:lnTo>
+                  <a:lnTo>
+                    <a:pt x="572980" y="1601166"/>
+                  </a:lnTo>
+                  <a:lnTo>
+                    <a:pt x="501357" y="1594759"/>
+                  </a:lnTo>
+                  <a:lnTo>
+                    <a:pt x="429735" y="1588313"/>
+                  </a:lnTo>
+                  <a:lnTo>
+                    <a:pt x="358112" y="1581826"/>
+                  </a:lnTo>
+                  <a:lnTo>
+                    <a:pt x="286490" y="1575298"/>
+                  </a:lnTo>
+                  <a:lnTo>
+                    <a:pt x="214867" y="1568730"/>
+                  </a:lnTo>
+                  <a:lnTo>
+                    <a:pt x="143245" y="1562121"/>
+                  </a:lnTo>
+                  <a:lnTo>
+                    <a:pt x="71622" y="1555470"/>
+                  </a:lnTo>
+                  <a:lnTo>
+                    <a:pt x="0" y="1548778"/>
                   </a:lnTo>
                   <a:close/>
                 </a:path>
@@ -3676,312 +3676,312 @@
           </p:nvSpPr>
           <p:spPr>
             <a:xfrm>
-              <a:off x="1172049" y="2940021"/>
-              <a:ext cx="7090630" cy="2028505"/>
+              <a:off x="1172049" y="2929026"/>
+              <a:ext cx="7090630" cy="2045009"/>
             </a:xfrm>
             <a:custGeom>
               <a:avLst/>
               <a:pathLst>
-                <a:path w="7090630" h="2028505">
+                <a:path w="7090630" h="2045009">
                   <a:moveTo>
                     <a:pt x="0" y="0"/>
                   </a:moveTo>
                   <a:lnTo>
-                    <a:pt x="71622" y="70042"/>
-                  </a:lnTo>
-                  <a:lnTo>
-                    <a:pt x="143245" y="138211"/>
-                  </a:lnTo>
-                  <a:lnTo>
-                    <a:pt x="214867" y="204555"/>
-                  </a:lnTo>
-                  <a:lnTo>
-                    <a:pt x="286490" y="269123"/>
-                  </a:lnTo>
-                  <a:lnTo>
-                    <a:pt x="358112" y="331964"/>
-                  </a:lnTo>
-                  <a:lnTo>
-                    <a:pt x="429735" y="393122"/>
-                  </a:lnTo>
-                  <a:lnTo>
-                    <a:pt x="501357" y="452644"/>
-                  </a:lnTo>
-                  <a:lnTo>
-                    <a:pt x="572980" y="510574"/>
-                  </a:lnTo>
-                  <a:lnTo>
-                    <a:pt x="644602" y="566952"/>
-                  </a:lnTo>
-                  <a:lnTo>
-                    <a:pt x="716225" y="621822"/>
-                  </a:lnTo>
-                  <a:lnTo>
-                    <a:pt x="787847" y="675224"/>
-                  </a:lnTo>
-                  <a:lnTo>
-                    <a:pt x="859470" y="727196"/>
-                  </a:lnTo>
-                  <a:lnTo>
-                    <a:pt x="931092" y="777777"/>
-                  </a:lnTo>
-                  <a:lnTo>
-                    <a:pt x="1002715" y="827005"/>
-                  </a:lnTo>
-                  <a:lnTo>
-                    <a:pt x="1074337" y="874916"/>
-                  </a:lnTo>
-                  <a:lnTo>
-                    <a:pt x="1145960" y="921544"/>
-                  </a:lnTo>
-                  <a:lnTo>
-                    <a:pt x="1217582" y="966924"/>
-                  </a:lnTo>
-                  <a:lnTo>
-                    <a:pt x="1289205" y="1011090"/>
-                  </a:lnTo>
-                  <a:lnTo>
-                    <a:pt x="1360827" y="1054074"/>
-                  </a:lnTo>
-                  <a:lnTo>
-                    <a:pt x="1432450" y="1095907"/>
-                  </a:lnTo>
-                  <a:lnTo>
-                    <a:pt x="1504073" y="1136621"/>
-                  </a:lnTo>
-                  <a:lnTo>
-                    <a:pt x="1575695" y="1176245"/>
-                  </a:lnTo>
-                  <a:lnTo>
-                    <a:pt x="1647318" y="1214809"/>
-                  </a:lnTo>
-                  <a:lnTo>
-                    <a:pt x="1718940" y="1252341"/>
-                  </a:lnTo>
-                  <a:lnTo>
-                    <a:pt x="1790563" y="1288868"/>
-                  </a:lnTo>
-                  <a:lnTo>
-                    <a:pt x="1862185" y="1324418"/>
-                  </a:lnTo>
-                  <a:lnTo>
-                    <a:pt x="1933808" y="1359017"/>
-                  </a:lnTo>
-                  <a:lnTo>
-                    <a:pt x="2005430" y="1392689"/>
-                  </a:lnTo>
-                  <a:lnTo>
-                    <a:pt x="2077053" y="1425461"/>
-                  </a:lnTo>
-                  <a:lnTo>
-                    <a:pt x="2148675" y="1457355"/>
-                  </a:lnTo>
-                  <a:lnTo>
-                    <a:pt x="2220298" y="1488396"/>
-                  </a:lnTo>
-                  <a:lnTo>
-                    <a:pt x="2291920" y="1518606"/>
-                  </a:lnTo>
-                  <a:lnTo>
-                    <a:pt x="2363543" y="1548007"/>
-                  </a:lnTo>
-                  <a:lnTo>
-                    <a:pt x="2435165" y="1576622"/>
-                  </a:lnTo>
-                  <a:lnTo>
-                    <a:pt x="2506788" y="1604471"/>
-                  </a:lnTo>
-                  <a:lnTo>
-                    <a:pt x="2578410" y="1631575"/>
-                  </a:lnTo>
-                  <a:lnTo>
-                    <a:pt x="2650033" y="1657953"/>
-                  </a:lnTo>
-                  <a:lnTo>
-                    <a:pt x="2721655" y="1683625"/>
-                  </a:lnTo>
-                  <a:lnTo>
-                    <a:pt x="2793278" y="1708610"/>
-                  </a:lnTo>
-                  <a:lnTo>
-                    <a:pt x="2864901" y="1732927"/>
-                  </a:lnTo>
-                  <a:lnTo>
-                    <a:pt x="2936523" y="1756593"/>
-                  </a:lnTo>
-                  <a:lnTo>
-                    <a:pt x="3008146" y="1779625"/>
-                  </a:lnTo>
-                  <a:lnTo>
-                    <a:pt x="3079768" y="1790971"/>
-                  </a:lnTo>
-                  <a:lnTo>
-                    <a:pt x="3151391" y="1795957"/>
-                  </a:lnTo>
-                  <a:lnTo>
-                    <a:pt x="3223013" y="1800913"/>
-                  </a:lnTo>
-                  <a:lnTo>
-                    <a:pt x="3294636" y="1805839"/>
-                  </a:lnTo>
-                  <a:lnTo>
-                    <a:pt x="3366258" y="1810735"/>
-                  </a:lnTo>
-                  <a:lnTo>
-                    <a:pt x="3437881" y="1815602"/>
-                  </a:lnTo>
-                  <a:lnTo>
-                    <a:pt x="3509503" y="1820439"/>
-                  </a:lnTo>
-                  <a:lnTo>
-                    <a:pt x="3581126" y="1825247"/>
-                  </a:lnTo>
-                  <a:lnTo>
-                    <a:pt x="3652748" y="1830027"/>
-                  </a:lnTo>
-                  <a:lnTo>
-                    <a:pt x="3724371" y="1834777"/>
-                  </a:lnTo>
-                  <a:lnTo>
-                    <a:pt x="3795993" y="1839498"/>
-                  </a:lnTo>
-                  <a:lnTo>
-                    <a:pt x="3867616" y="1844192"/>
-                  </a:lnTo>
-                  <a:lnTo>
-                    <a:pt x="3939238" y="1848856"/>
-                  </a:lnTo>
-                  <a:lnTo>
-                    <a:pt x="4010861" y="1853493"/>
-                  </a:lnTo>
-                  <a:lnTo>
-                    <a:pt x="4082483" y="1858102"/>
-                  </a:lnTo>
-                  <a:lnTo>
-                    <a:pt x="4154106" y="1862683"/>
-                  </a:lnTo>
-                  <a:lnTo>
-                    <a:pt x="4225729" y="1867236"/>
-                  </a:lnTo>
-                  <a:lnTo>
-                    <a:pt x="4297351" y="1871762"/>
-                  </a:lnTo>
-                  <a:lnTo>
-                    <a:pt x="4368974" y="1876260"/>
-                  </a:lnTo>
-                  <a:lnTo>
-                    <a:pt x="4440596" y="1880731"/>
-                  </a:lnTo>
-                  <a:lnTo>
-                    <a:pt x="4512219" y="1885176"/>
-                  </a:lnTo>
-                  <a:lnTo>
-                    <a:pt x="4583841" y="1889593"/>
-                  </a:lnTo>
-                  <a:lnTo>
-                    <a:pt x="4655464" y="1893984"/>
-                  </a:lnTo>
-                  <a:lnTo>
-                    <a:pt x="4727086" y="1898348"/>
-                  </a:lnTo>
-                  <a:lnTo>
-                    <a:pt x="4798709" y="1902686"/>
-                  </a:lnTo>
-                  <a:lnTo>
-                    <a:pt x="4870331" y="1906998"/>
-                  </a:lnTo>
-                  <a:lnTo>
-                    <a:pt x="4941954" y="1911284"/>
-                  </a:lnTo>
-                  <a:lnTo>
-                    <a:pt x="5013576" y="1915544"/>
-                  </a:lnTo>
-                  <a:lnTo>
-                    <a:pt x="5085199" y="1919778"/>
-                  </a:lnTo>
-                  <a:lnTo>
-                    <a:pt x="5156821" y="1923987"/>
-                  </a:lnTo>
-                  <a:lnTo>
-                    <a:pt x="5228444" y="1928170"/>
-                  </a:lnTo>
-                  <a:lnTo>
-                    <a:pt x="5300066" y="1932328"/>
-                  </a:lnTo>
-                  <a:lnTo>
-                    <a:pt x="5371689" y="1936461"/>
-                  </a:lnTo>
-                  <a:lnTo>
-                    <a:pt x="5443311" y="1940569"/>
-                  </a:lnTo>
-                  <a:lnTo>
-                    <a:pt x="5514934" y="1944652"/>
-                  </a:lnTo>
-                  <a:lnTo>
-                    <a:pt x="5586557" y="1948711"/>
-                  </a:lnTo>
-                  <a:lnTo>
-                    <a:pt x="5658179" y="1952745"/>
-                  </a:lnTo>
-                  <a:lnTo>
-                    <a:pt x="5729802" y="1956755"/>
-                  </a:lnTo>
-                  <a:lnTo>
-                    <a:pt x="5801424" y="1960740"/>
-                  </a:lnTo>
-                  <a:lnTo>
-                    <a:pt x="5873047" y="1964702"/>
-                  </a:lnTo>
-                  <a:lnTo>
-                    <a:pt x="5944669" y="1968639"/>
-                  </a:lnTo>
-                  <a:lnTo>
-                    <a:pt x="6016292" y="1972553"/>
-                  </a:lnTo>
-                  <a:lnTo>
-                    <a:pt x="6087914" y="1976444"/>
-                  </a:lnTo>
-                  <a:lnTo>
-                    <a:pt x="6159537" y="1980310"/>
-                  </a:lnTo>
-                  <a:lnTo>
-                    <a:pt x="6231159" y="1984154"/>
-                  </a:lnTo>
-                  <a:lnTo>
-                    <a:pt x="6302782" y="1987974"/>
-                  </a:lnTo>
-                  <a:lnTo>
-                    <a:pt x="6374404" y="1991771"/>
-                  </a:lnTo>
-                  <a:lnTo>
-                    <a:pt x="6446027" y="1995545"/>
-                  </a:lnTo>
-                  <a:lnTo>
-                    <a:pt x="6517649" y="1999297"/>
-                  </a:lnTo>
-                  <a:lnTo>
-                    <a:pt x="6589272" y="2003026"/>
-                  </a:lnTo>
-                  <a:lnTo>
-                    <a:pt x="6660894" y="2006732"/>
-                  </a:lnTo>
-                  <a:lnTo>
-                    <a:pt x="6732517" y="2010416"/>
-                  </a:lnTo>
-                  <a:lnTo>
-                    <a:pt x="6804139" y="2014078"/>
-                  </a:lnTo>
-                  <a:lnTo>
-                    <a:pt x="6875762" y="2017717"/>
-                  </a:lnTo>
-                  <a:lnTo>
-                    <a:pt x="6947385" y="2021335"/>
-                  </a:lnTo>
-                  <a:lnTo>
-                    <a:pt x="7019007" y="2024931"/>
-                  </a:lnTo>
-                  <a:lnTo>
-                    <a:pt x="7090630" y="2028505"/>
+                    <a:pt x="71622" y="70590"/>
+                  </a:lnTo>
+                  <a:lnTo>
+                    <a:pt x="143245" y="139284"/>
+                  </a:lnTo>
+                  <a:lnTo>
+                    <a:pt x="214867" y="206133"/>
+                  </a:lnTo>
+                  <a:lnTo>
+                    <a:pt x="286490" y="271187"/>
+                  </a:lnTo>
+                  <a:lnTo>
+                    <a:pt x="358112" y="334494"/>
+                  </a:lnTo>
+                  <a:lnTo>
+                    <a:pt x="429735" y="396100"/>
+                  </a:lnTo>
+                  <a:lnTo>
+                    <a:pt x="501357" y="456051"/>
+                  </a:lnTo>
+                  <a:lnTo>
+                    <a:pt x="572980" y="514393"/>
+                  </a:lnTo>
+                  <a:lnTo>
+                    <a:pt x="644602" y="571167"/>
+                  </a:lnTo>
+                  <a:lnTo>
+                    <a:pt x="716225" y="626417"/>
+                  </a:lnTo>
+                  <a:lnTo>
+                    <a:pt x="787847" y="680182"/>
+                  </a:lnTo>
+                  <a:lnTo>
+                    <a:pt x="859470" y="732504"/>
+                  </a:lnTo>
+                  <a:lnTo>
+                    <a:pt x="931092" y="783420"/>
+                  </a:lnTo>
+                  <a:lnTo>
+                    <a:pt x="1002715" y="832969"/>
+                  </a:lnTo>
+                  <a:lnTo>
+                    <a:pt x="1074337" y="881187"/>
+                  </a:lnTo>
+                  <a:lnTo>
+                    <a:pt x="1145960" y="928109"/>
+                  </a:lnTo>
+                  <a:lnTo>
+                    <a:pt x="1217582" y="973772"/>
+                  </a:lnTo>
+                  <a:lnTo>
+                    <a:pt x="1289205" y="1018208"/>
+                  </a:lnTo>
+                  <a:lnTo>
+                    <a:pt x="1360827" y="1061451"/>
+                  </a:lnTo>
+                  <a:lnTo>
+                    <a:pt x="1432450" y="1103532"/>
+                  </a:lnTo>
+                  <a:lnTo>
+                    <a:pt x="1504073" y="1144483"/>
+                  </a:lnTo>
+                  <a:lnTo>
+                    <a:pt x="1575695" y="1184334"/>
+                  </a:lnTo>
+                  <a:lnTo>
+                    <a:pt x="1647318" y="1223115"/>
+                  </a:lnTo>
+                  <a:lnTo>
+                    <a:pt x="1718940" y="1260854"/>
+                  </a:lnTo>
+                  <a:lnTo>
+                    <a:pt x="1790563" y="1297579"/>
+                  </a:lnTo>
+                  <a:lnTo>
+                    <a:pt x="1862185" y="1333319"/>
+                  </a:lnTo>
+                  <a:lnTo>
+                    <a:pt x="1933808" y="1368098"/>
+                  </a:lnTo>
+                  <a:lnTo>
+                    <a:pt x="2005430" y="1401943"/>
+                  </a:lnTo>
+                  <a:lnTo>
+                    <a:pt x="2077053" y="1434879"/>
+                  </a:lnTo>
+                  <a:lnTo>
+                    <a:pt x="2148675" y="1466930"/>
+                  </a:lnTo>
+                  <a:lnTo>
+                    <a:pt x="2220298" y="1498121"/>
+                  </a:lnTo>
+                  <a:lnTo>
+                    <a:pt x="2291920" y="1528474"/>
+                  </a:lnTo>
+                  <a:lnTo>
+                    <a:pt x="2363543" y="1558012"/>
+                  </a:lnTo>
+                  <a:lnTo>
+                    <a:pt x="2435165" y="1586756"/>
+                  </a:lnTo>
+                  <a:lnTo>
+                    <a:pt x="2506788" y="1614728"/>
+                  </a:lnTo>
+                  <a:lnTo>
+                    <a:pt x="2578410" y="1641949"/>
+                  </a:lnTo>
+                  <a:lnTo>
+                    <a:pt x="2650033" y="1668439"/>
+                  </a:lnTo>
+                  <a:lnTo>
+                    <a:pt x="2721655" y="1694217"/>
+                  </a:lnTo>
+                  <a:lnTo>
+                    <a:pt x="2793278" y="1719303"/>
+                  </a:lnTo>
+                  <a:lnTo>
+                    <a:pt x="2864901" y="1743716"/>
+                  </a:lnTo>
+                  <a:lnTo>
+                    <a:pt x="2936523" y="1767472"/>
+                  </a:lnTo>
+                  <a:lnTo>
+                    <a:pt x="3008146" y="1790591"/>
+                  </a:lnTo>
+                  <a:lnTo>
+                    <a:pt x="3079768" y="1802054"/>
+                  </a:lnTo>
+                  <a:lnTo>
+                    <a:pt x="3151391" y="1807176"/>
+                  </a:lnTo>
+                  <a:lnTo>
+                    <a:pt x="3223013" y="1812266"/>
+                  </a:lnTo>
+                  <a:lnTo>
+                    <a:pt x="3294636" y="1817324"/>
+                  </a:lnTo>
+                  <a:lnTo>
+                    <a:pt x="3366258" y="1822351"/>
+                  </a:lnTo>
+                  <a:lnTo>
+                    <a:pt x="3437881" y="1827347"/>
+                  </a:lnTo>
+                  <a:lnTo>
+                    <a:pt x="3509503" y="1832312"/>
+                  </a:lnTo>
+                  <a:lnTo>
+                    <a:pt x="3581126" y="1837246"/>
+                  </a:lnTo>
+                  <a:lnTo>
+                    <a:pt x="3652748" y="1842150"/>
+                  </a:lnTo>
+                  <a:lnTo>
+                    <a:pt x="3724371" y="1847023"/>
+                  </a:lnTo>
+                  <a:lnTo>
+                    <a:pt x="3795993" y="1851866"/>
+                  </a:lnTo>
+                  <a:lnTo>
+                    <a:pt x="3867616" y="1856679"/>
+                  </a:lnTo>
+                  <a:lnTo>
+                    <a:pt x="3939238" y="1861462"/>
+                  </a:lnTo>
+                  <a:lnTo>
+                    <a:pt x="4010861" y="1866215"/>
+                  </a:lnTo>
+                  <a:lnTo>
+                    <a:pt x="4082483" y="1870939"/>
+                  </a:lnTo>
+                  <a:lnTo>
+                    <a:pt x="4154106" y="1875634"/>
+                  </a:lnTo>
+                  <a:lnTo>
+                    <a:pt x="4225729" y="1880300"/>
+                  </a:lnTo>
+                  <a:lnTo>
+                    <a:pt x="4297351" y="1884936"/>
+                  </a:lnTo>
+                  <a:lnTo>
+                    <a:pt x="4368974" y="1889544"/>
+                  </a:lnTo>
+                  <a:lnTo>
+                    <a:pt x="4440596" y="1894124"/>
+                  </a:lnTo>
+                  <a:lnTo>
+                    <a:pt x="4512219" y="1898675"/>
+                  </a:lnTo>
+                  <a:lnTo>
+                    <a:pt x="4583841" y="1903197"/>
+                  </a:lnTo>
+                  <a:lnTo>
+                    <a:pt x="4655464" y="1907692"/>
+                  </a:lnTo>
+                  <a:lnTo>
+                    <a:pt x="4727086" y="1912159"/>
+                  </a:lnTo>
+                  <a:lnTo>
+                    <a:pt x="4798709" y="1916598"/>
+                  </a:lnTo>
+                  <a:lnTo>
+                    <a:pt x="4870331" y="1921010"/>
+                  </a:lnTo>
+                  <a:lnTo>
+                    <a:pt x="4941954" y="1925394"/>
+                  </a:lnTo>
+                  <a:lnTo>
+                    <a:pt x="5013576" y="1929751"/>
+                  </a:lnTo>
+                  <a:lnTo>
+                    <a:pt x="5085199" y="1934081"/>
+                  </a:lnTo>
+                  <a:lnTo>
+                    <a:pt x="5156821" y="1938384"/>
+                  </a:lnTo>
+                  <a:lnTo>
+                    <a:pt x="5228444" y="1942661"/>
+                  </a:lnTo>
+                  <a:lnTo>
+                    <a:pt x="5300066" y="1946911"/>
+                  </a:lnTo>
+                  <a:lnTo>
+                    <a:pt x="5371689" y="1951135"/>
+                  </a:lnTo>
+                  <a:lnTo>
+                    <a:pt x="5443311" y="1955332"/>
+                  </a:lnTo>
+                  <a:lnTo>
+                    <a:pt x="5514934" y="1959504"/>
+                  </a:lnTo>
+                  <a:lnTo>
+                    <a:pt x="5586557" y="1963649"/>
+                  </a:lnTo>
+                  <a:lnTo>
+                    <a:pt x="5658179" y="1967769"/>
+                  </a:lnTo>
+                  <a:lnTo>
+                    <a:pt x="5729802" y="1971864"/>
+                  </a:lnTo>
+                  <a:lnTo>
+                    <a:pt x="5801424" y="1975933"/>
+                  </a:lnTo>
+                  <a:lnTo>
+                    <a:pt x="5873047" y="1979976"/>
+                  </a:lnTo>
+                  <a:lnTo>
+                    <a:pt x="5944669" y="1983995"/>
+                  </a:lnTo>
+                  <a:lnTo>
+                    <a:pt x="6016292" y="1987989"/>
+                  </a:lnTo>
+                  <a:lnTo>
+                    <a:pt x="6087914" y="1991958"/>
+                  </a:lnTo>
+                  <a:lnTo>
+                    <a:pt x="6159537" y="1995902"/>
+                  </a:lnTo>
+                  <a:lnTo>
+                    <a:pt x="6231159" y="1999822"/>
+                  </a:lnTo>
+                  <a:lnTo>
+                    <a:pt x="6302782" y="2003718"/>
+                  </a:lnTo>
+                  <a:lnTo>
+                    <a:pt x="6374404" y="2007590"/>
+                  </a:lnTo>
+                  <a:lnTo>
+                    <a:pt x="6446027" y="2011437"/>
+                  </a:lnTo>
+                  <a:lnTo>
+                    <a:pt x="6517649" y="2015261"/>
+                  </a:lnTo>
+                  <a:lnTo>
+                    <a:pt x="6589272" y="2019061"/>
+                  </a:lnTo>
+                  <a:lnTo>
+                    <a:pt x="6660894" y="2022837"/>
+                  </a:lnTo>
+                  <a:lnTo>
+                    <a:pt x="6732517" y="2026590"/>
+                  </a:lnTo>
+                  <a:lnTo>
+                    <a:pt x="6804139" y="2030320"/>
+                  </a:lnTo>
+                  <a:lnTo>
+                    <a:pt x="6875762" y="2034027"/>
+                  </a:lnTo>
+                  <a:lnTo>
+                    <a:pt x="6947385" y="2037710"/>
+                  </a:lnTo>
+                  <a:lnTo>
+                    <a:pt x="7019007" y="2041371"/>
+                  </a:lnTo>
+                  <a:lnTo>
+                    <a:pt x="7090630" y="2045009"/>
                   </a:lnTo>
                 </a:path>
               </a:pathLst>
@@ -4001,309 +4001,309 @@
           </p:nvSpPr>
           <p:spPr>
             <a:xfrm>
-              <a:off x="1172049" y="4485368"/>
-              <a:ext cx="7090630" cy="893430"/>
+              <a:off x="1172049" y="4477805"/>
+              <a:ext cx="7090630" cy="901991"/>
             </a:xfrm>
             <a:custGeom>
               <a:avLst/>
               <a:pathLst>
-                <a:path w="7090630" h="893430">
+                <a:path w="7090630" h="901991">
                   <a:moveTo>
-                    <a:pt x="7090630" y="893430"/>
+                    <a:pt x="7090630" y="901991"/>
                   </a:moveTo>
                   <a:lnTo>
-                    <a:pt x="7019007" y="888523"/>
-                  </a:lnTo>
-                  <a:lnTo>
-                    <a:pt x="6947385" y="883481"/>
-                  </a:lnTo>
-                  <a:lnTo>
-                    <a:pt x="6875762" y="878300"/>
-                  </a:lnTo>
-                  <a:lnTo>
-                    <a:pt x="6804139" y="872977"/>
-                  </a:lnTo>
-                  <a:lnTo>
-                    <a:pt x="6732517" y="867507"/>
-                  </a:lnTo>
-                  <a:lnTo>
-                    <a:pt x="6660894" y="861888"/>
-                  </a:lnTo>
-                  <a:lnTo>
-                    <a:pt x="6589272" y="856113"/>
-                  </a:lnTo>
-                  <a:lnTo>
-                    <a:pt x="6517649" y="850180"/>
-                  </a:lnTo>
-                  <a:lnTo>
-                    <a:pt x="6446027" y="844084"/>
-                  </a:lnTo>
-                  <a:lnTo>
-                    <a:pt x="6374404" y="837820"/>
-                  </a:lnTo>
-                  <a:lnTo>
-                    <a:pt x="6302782" y="831383"/>
-                  </a:lnTo>
-                  <a:lnTo>
-                    <a:pt x="6231159" y="824770"/>
-                  </a:lnTo>
-                  <a:lnTo>
-                    <a:pt x="6159537" y="817975"/>
-                  </a:lnTo>
-                  <a:lnTo>
-                    <a:pt x="6087914" y="810993"/>
-                  </a:lnTo>
-                  <a:lnTo>
-                    <a:pt x="6016292" y="803819"/>
-                  </a:lnTo>
-                  <a:lnTo>
-                    <a:pt x="5944669" y="796448"/>
-                  </a:lnTo>
-                  <a:lnTo>
-                    <a:pt x="5873047" y="788874"/>
-                  </a:lnTo>
-                  <a:lnTo>
-                    <a:pt x="5801424" y="781092"/>
-                  </a:lnTo>
-                  <a:lnTo>
-                    <a:pt x="5729802" y="773096"/>
-                  </a:lnTo>
-                  <a:lnTo>
-                    <a:pt x="5658179" y="764880"/>
-                  </a:lnTo>
-                  <a:lnTo>
-                    <a:pt x="5586557" y="756438"/>
-                  </a:lnTo>
-                  <a:lnTo>
-                    <a:pt x="5514934" y="747764"/>
-                  </a:lnTo>
-                  <a:lnTo>
-                    <a:pt x="5443311" y="738851"/>
-                  </a:lnTo>
-                  <a:lnTo>
-                    <a:pt x="5371689" y="729694"/>
-                  </a:lnTo>
-                  <a:lnTo>
-                    <a:pt x="5300066" y="720284"/>
-                  </a:lnTo>
-                  <a:lnTo>
-                    <a:pt x="5228444" y="710616"/>
-                  </a:lnTo>
-                  <a:lnTo>
-                    <a:pt x="5156821" y="700682"/>
-                  </a:lnTo>
-                  <a:lnTo>
-                    <a:pt x="5085199" y="690474"/>
-                  </a:lnTo>
-                  <a:lnTo>
-                    <a:pt x="5013576" y="679987"/>
-                  </a:lnTo>
-                  <a:lnTo>
-                    <a:pt x="4941954" y="669210"/>
-                  </a:lnTo>
-                  <a:lnTo>
-                    <a:pt x="4870331" y="658137"/>
-                  </a:lnTo>
-                  <a:lnTo>
-                    <a:pt x="4798709" y="646760"/>
-                  </a:lnTo>
-                  <a:lnTo>
-                    <a:pt x="4727086" y="635070"/>
-                  </a:lnTo>
-                  <a:lnTo>
-                    <a:pt x="4655464" y="623059"/>
-                  </a:lnTo>
-                  <a:lnTo>
-                    <a:pt x="4583841" y="610717"/>
-                  </a:lnTo>
-                  <a:lnTo>
-                    <a:pt x="4512219" y="598036"/>
-                  </a:lnTo>
-                  <a:lnTo>
-                    <a:pt x="4440596" y="585006"/>
-                  </a:lnTo>
-                  <a:lnTo>
-                    <a:pt x="4368974" y="571618"/>
-                  </a:lnTo>
-                  <a:lnTo>
-                    <a:pt x="4297351" y="557862"/>
-                  </a:lnTo>
-                  <a:lnTo>
-                    <a:pt x="4225729" y="543727"/>
-                  </a:lnTo>
-                  <a:lnTo>
-                    <a:pt x="4154106" y="529204"/>
-                  </a:lnTo>
-                  <a:lnTo>
-                    <a:pt x="4082483" y="514281"/>
-                  </a:lnTo>
-                  <a:lnTo>
-                    <a:pt x="4010861" y="498948"/>
-                  </a:lnTo>
-                  <a:lnTo>
-                    <a:pt x="3939238" y="483194"/>
-                  </a:lnTo>
-                  <a:lnTo>
-                    <a:pt x="3867616" y="467006"/>
-                  </a:lnTo>
-                  <a:lnTo>
-                    <a:pt x="3795993" y="450373"/>
-                  </a:lnTo>
-                  <a:lnTo>
-                    <a:pt x="3724371" y="433283"/>
-                  </a:lnTo>
-                  <a:lnTo>
-                    <a:pt x="3652748" y="415723"/>
-                  </a:lnTo>
-                  <a:lnTo>
-                    <a:pt x="3581126" y="397679"/>
-                  </a:lnTo>
-                  <a:lnTo>
-                    <a:pt x="3509503" y="379140"/>
-                  </a:lnTo>
-                  <a:lnTo>
-                    <a:pt x="3437881" y="360091"/>
-                  </a:lnTo>
-                  <a:lnTo>
-                    <a:pt x="3366258" y="340518"/>
-                  </a:lnTo>
-                  <a:lnTo>
-                    <a:pt x="3294636" y="320407"/>
-                  </a:lnTo>
-                  <a:lnTo>
-                    <a:pt x="3223013" y="299743"/>
-                  </a:lnTo>
-                  <a:lnTo>
-                    <a:pt x="3151391" y="278511"/>
-                  </a:lnTo>
-                  <a:lnTo>
-                    <a:pt x="3079768" y="256694"/>
-                  </a:lnTo>
-                  <a:lnTo>
-                    <a:pt x="3008146" y="240608"/>
-                  </a:lnTo>
-                  <a:lnTo>
-                    <a:pt x="2936523" y="235561"/>
-                  </a:lnTo>
-                  <a:lnTo>
-                    <a:pt x="2864901" y="230484"/>
-                  </a:lnTo>
-                  <a:lnTo>
-                    <a:pt x="2793278" y="225376"/>
-                  </a:lnTo>
-                  <a:lnTo>
-                    <a:pt x="2721655" y="220237"/>
-                  </a:lnTo>
-                  <a:lnTo>
-                    <a:pt x="2650033" y="215066"/>
-                  </a:lnTo>
-                  <a:lnTo>
-                    <a:pt x="2578410" y="209864"/>
-                  </a:lnTo>
-                  <a:lnTo>
-                    <a:pt x="2506788" y="204631"/>
-                  </a:lnTo>
-                  <a:lnTo>
-                    <a:pt x="2435165" y="199366"/>
-                  </a:lnTo>
-                  <a:lnTo>
-                    <a:pt x="2363543" y="194069"/>
-                  </a:lnTo>
-                  <a:lnTo>
-                    <a:pt x="2291920" y="188740"/>
-                  </a:lnTo>
-                  <a:lnTo>
-                    <a:pt x="2220298" y="183378"/>
-                  </a:lnTo>
-                  <a:lnTo>
-                    <a:pt x="2148675" y="177984"/>
-                  </a:lnTo>
-                  <a:lnTo>
-                    <a:pt x="2077053" y="172557"/>
-                  </a:lnTo>
-                  <a:lnTo>
-                    <a:pt x="2005430" y="167097"/>
-                  </a:lnTo>
-                  <a:lnTo>
-                    <a:pt x="1933808" y="161604"/>
-                  </a:lnTo>
-                  <a:lnTo>
-                    <a:pt x="1862185" y="156078"/>
-                  </a:lnTo>
-                  <a:lnTo>
-                    <a:pt x="1790563" y="150518"/>
-                  </a:lnTo>
-                  <a:lnTo>
-                    <a:pt x="1718940" y="144925"/>
-                  </a:lnTo>
-                  <a:lnTo>
-                    <a:pt x="1647318" y="139297"/>
-                  </a:lnTo>
-                  <a:lnTo>
-                    <a:pt x="1575695" y="133635"/>
-                  </a:lnTo>
-                  <a:lnTo>
-                    <a:pt x="1504073" y="127939"/>
-                  </a:lnTo>
-                  <a:lnTo>
-                    <a:pt x="1432450" y="122208"/>
-                  </a:lnTo>
-                  <a:lnTo>
-                    <a:pt x="1360827" y="116443"/>
-                  </a:lnTo>
-                  <a:lnTo>
-                    <a:pt x="1289205" y="110642"/>
-                  </a:lnTo>
-                  <a:lnTo>
-                    <a:pt x="1217582" y="104807"/>
-                  </a:lnTo>
-                  <a:lnTo>
-                    <a:pt x="1145960" y="98936"/>
-                  </a:lnTo>
-                  <a:lnTo>
-                    <a:pt x="1074337" y="93029"/>
-                  </a:lnTo>
-                  <a:lnTo>
-                    <a:pt x="1002715" y="87086"/>
-                  </a:lnTo>
-                  <a:lnTo>
-                    <a:pt x="931092" y="81107"/>
-                  </a:lnTo>
-                  <a:lnTo>
-                    <a:pt x="859470" y="75092"/>
-                  </a:lnTo>
-                  <a:lnTo>
-                    <a:pt x="787847" y="69041"/>
-                  </a:lnTo>
-                  <a:lnTo>
-                    <a:pt x="716225" y="62953"/>
-                  </a:lnTo>
-                  <a:lnTo>
-                    <a:pt x="644602" y="56827"/>
-                  </a:lnTo>
-                  <a:lnTo>
-                    <a:pt x="572980" y="50665"/>
-                  </a:lnTo>
-                  <a:lnTo>
-                    <a:pt x="501357" y="44465"/>
-                  </a:lnTo>
-                  <a:lnTo>
-                    <a:pt x="429735" y="38228"/>
-                  </a:lnTo>
-                  <a:lnTo>
-                    <a:pt x="358112" y="31952"/>
-                  </a:lnTo>
-                  <a:lnTo>
-                    <a:pt x="286490" y="25639"/>
-                  </a:lnTo>
-                  <a:lnTo>
-                    <a:pt x="214867" y="19287"/>
-                  </a:lnTo>
-                  <a:lnTo>
-                    <a:pt x="143245" y="12897"/>
-                  </a:lnTo>
-                  <a:lnTo>
-                    <a:pt x="71622" y="6468"/>
+                    <a:pt x="7019007" y="897093"/>
+                  </a:lnTo>
+                  <a:lnTo>
+                    <a:pt x="6947385" y="892060"/>
+                  </a:lnTo>
+                  <a:lnTo>
+                    <a:pt x="6875762" y="886888"/>
+                  </a:lnTo>
+                  <a:lnTo>
+                    <a:pt x="6804139" y="881574"/>
+                  </a:lnTo>
+                  <a:lnTo>
+                    <a:pt x="6732517" y="876113"/>
+                  </a:lnTo>
+                  <a:lnTo>
+                    <a:pt x="6660894" y="870501"/>
+                  </a:lnTo>
+                  <a:lnTo>
+                    <a:pt x="6589272" y="864734"/>
+                  </a:lnTo>
+                  <a:lnTo>
+                    <a:pt x="6517649" y="858808"/>
+                  </a:lnTo>
+                  <a:lnTo>
+                    <a:pt x="6446027" y="852718"/>
+                  </a:lnTo>
+                  <a:lnTo>
+                    <a:pt x="6374404" y="846461"/>
+                  </a:lnTo>
+                  <a:lnTo>
+                    <a:pt x="6302782" y="840031"/>
+                  </a:lnTo>
+                  <a:lnTo>
+                    <a:pt x="6231159" y="833423"/>
+                  </a:lnTo>
+                  <a:lnTo>
+                    <a:pt x="6159537" y="826633"/>
+                  </a:lnTo>
+                  <a:lnTo>
+                    <a:pt x="6087914" y="819655"/>
+                  </a:lnTo>
+                  <a:lnTo>
+                    <a:pt x="6016292" y="812485"/>
+                  </a:lnTo>
+                  <a:lnTo>
+                    <a:pt x="5944669" y="805117"/>
+                  </a:lnTo>
+                  <a:lnTo>
+                    <a:pt x="5873047" y="797546"/>
+                  </a:lnTo>
+                  <a:lnTo>
+                    <a:pt x="5801424" y="789765"/>
+                  </a:lnTo>
+                  <a:lnTo>
+                    <a:pt x="5729802" y="781770"/>
+                  </a:lnTo>
+                  <a:lnTo>
+                    <a:pt x="5658179" y="773554"/>
+                  </a:lnTo>
+                  <a:lnTo>
+                    <a:pt x="5586557" y="765112"/>
+                  </a:lnTo>
+                  <a:lnTo>
+                    <a:pt x="5514934" y="756436"/>
+                  </a:lnTo>
+                  <a:lnTo>
+                    <a:pt x="5443311" y="747521"/>
+                  </a:lnTo>
+                  <a:lnTo>
+                    <a:pt x="5371689" y="738360"/>
+                  </a:lnTo>
+                  <a:lnTo>
+                    <a:pt x="5300066" y="728947"/>
+                  </a:lnTo>
+                  <a:lnTo>
+                    <a:pt x="5228444" y="719273"/>
+                  </a:lnTo>
+                  <a:lnTo>
+                    <a:pt x="5156821" y="709332"/>
+                  </a:lnTo>
+                  <a:lnTo>
+                    <a:pt x="5085199" y="699117"/>
+                  </a:lnTo>
+                  <a:lnTo>
+                    <a:pt x="5013576" y="688620"/>
+                  </a:lnTo>
+                  <a:lnTo>
+                    <a:pt x="4941954" y="677834"/>
+                  </a:lnTo>
+                  <a:lnTo>
+                    <a:pt x="4870331" y="666749"/>
+                  </a:lnTo>
+                  <a:lnTo>
+                    <a:pt x="4798709" y="655359"/>
+                  </a:lnTo>
+                  <a:lnTo>
+                    <a:pt x="4727086" y="643654"/>
+                  </a:lnTo>
+                  <a:lnTo>
+                    <a:pt x="4655464" y="631627"/>
+                  </a:lnTo>
+                  <a:lnTo>
+                    <a:pt x="4583841" y="619267"/>
+                  </a:lnTo>
+                  <a:lnTo>
+                    <a:pt x="4512219" y="606566"/>
+                  </a:lnTo>
+                  <a:lnTo>
+                    <a:pt x="4440596" y="593515"/>
+                  </a:lnTo>
+                  <a:lnTo>
+                    <a:pt x="4368974" y="580103"/>
+                  </a:lnTo>
+                  <a:lnTo>
+                    <a:pt x="4297351" y="566322"/>
+                  </a:lnTo>
+                  <a:lnTo>
+                    <a:pt x="4225729" y="552159"/>
+                  </a:lnTo>
+                  <a:lnTo>
+                    <a:pt x="4154106" y="537606"/>
+                  </a:lnTo>
+                  <a:lnTo>
+                    <a:pt x="4082483" y="522652"/>
+                  </a:lnTo>
+                  <a:lnTo>
+                    <a:pt x="4010861" y="507285"/>
+                  </a:lnTo>
+                  <a:lnTo>
+                    <a:pt x="3939238" y="491493"/>
+                  </a:lnTo>
+                  <a:lnTo>
+                    <a:pt x="3867616" y="475266"/>
+                  </a:lnTo>
+                  <a:lnTo>
+                    <a:pt x="3795993" y="458590"/>
+                  </a:lnTo>
+                  <a:lnTo>
+                    <a:pt x="3724371" y="441455"/>
+                  </a:lnTo>
+                  <a:lnTo>
+                    <a:pt x="3652748" y="423847"/>
+                  </a:lnTo>
+                  <a:lnTo>
+                    <a:pt x="3581126" y="405752"/>
+                  </a:lnTo>
+                  <a:lnTo>
+                    <a:pt x="3509503" y="387158"/>
+                  </a:lnTo>
+                  <a:lnTo>
+                    <a:pt x="3437881" y="368052"/>
+                  </a:lnTo>
+                  <a:lnTo>
+                    <a:pt x="3366258" y="348417"/>
+                  </a:lnTo>
+                  <a:lnTo>
+                    <a:pt x="3294636" y="328241"/>
+                  </a:lnTo>
+                  <a:lnTo>
+                    <a:pt x="3223013" y="307508"/>
+                  </a:lnTo>
+                  <a:lnTo>
+                    <a:pt x="3151391" y="286203"/>
+                  </a:lnTo>
+                  <a:lnTo>
+                    <a:pt x="3079768" y="264309"/>
+                  </a:lnTo>
+                  <a:lnTo>
+                    <a:pt x="3008146" y="248121"/>
+                  </a:lnTo>
+                  <a:lnTo>
+                    <a:pt x="2936523" y="242936"/>
+                  </a:lnTo>
+                  <a:lnTo>
+                    <a:pt x="2864901" y="237717"/>
+                  </a:lnTo>
+                  <a:lnTo>
+                    <a:pt x="2793278" y="232467"/>
+                  </a:lnTo>
+                  <a:lnTo>
+                    <a:pt x="2721655" y="227183"/>
+                  </a:lnTo>
+                  <a:lnTo>
+                    <a:pt x="2650033" y="221867"/>
+                  </a:lnTo>
+                  <a:lnTo>
+                    <a:pt x="2578410" y="216517"/>
+                  </a:lnTo>
+                  <a:lnTo>
+                    <a:pt x="2506788" y="211134"/>
+                  </a:lnTo>
+                  <a:lnTo>
+                    <a:pt x="2435165" y="205718"/>
+                  </a:lnTo>
+                  <a:lnTo>
+                    <a:pt x="2363543" y="200267"/>
+                  </a:lnTo>
+                  <a:lnTo>
+                    <a:pt x="2291920" y="194783"/>
+                  </a:lnTo>
+                  <a:lnTo>
+                    <a:pt x="2220298" y="189264"/>
+                  </a:lnTo>
+                  <a:lnTo>
+                    <a:pt x="2148675" y="183711"/>
+                  </a:lnTo>
+                  <a:lnTo>
+                    <a:pt x="2077053" y="178124"/>
+                  </a:lnTo>
+                  <a:lnTo>
+                    <a:pt x="2005430" y="172501"/>
+                  </a:lnTo>
+                  <a:lnTo>
+                    <a:pt x="1933808" y="166844"/>
+                  </a:lnTo>
+                  <a:lnTo>
+                    <a:pt x="1862185" y="161151"/>
+                  </a:lnTo>
+                  <a:lnTo>
+                    <a:pt x="1790563" y="155423"/>
+                  </a:lnTo>
+                  <a:lnTo>
+                    <a:pt x="1718940" y="149659"/>
+                  </a:lnTo>
+                  <a:lnTo>
+                    <a:pt x="1647318" y="143859"/>
+                  </a:lnTo>
+                  <a:lnTo>
+                    <a:pt x="1575695" y="138022"/>
+                  </a:lnTo>
+                  <a:lnTo>
+                    <a:pt x="1504073" y="132150"/>
+                  </a:lnTo>
+                  <a:lnTo>
+                    <a:pt x="1432450" y="126240"/>
+                  </a:lnTo>
+                  <a:lnTo>
+                    <a:pt x="1360827" y="120294"/>
+                  </a:lnTo>
+                  <a:lnTo>
+                    <a:pt x="1289205" y="114311"/>
+                  </a:lnTo>
+                  <a:lnTo>
+                    <a:pt x="1217582" y="108291"/>
+                  </a:lnTo>
+                  <a:lnTo>
+                    <a:pt x="1145960" y="102232"/>
+                  </a:lnTo>
+                  <a:lnTo>
+                    <a:pt x="1074337" y="96137"/>
+                  </a:lnTo>
+                  <a:lnTo>
+                    <a:pt x="1002715" y="90003"/>
+                  </a:lnTo>
+                  <a:lnTo>
+                    <a:pt x="931092" y="83830"/>
+                  </a:lnTo>
+                  <a:lnTo>
+                    <a:pt x="859470" y="77620"/>
+                  </a:lnTo>
+                  <a:lnTo>
+                    <a:pt x="787847" y="71370"/>
+                  </a:lnTo>
+                  <a:lnTo>
+                    <a:pt x="716225" y="65082"/>
+                  </a:lnTo>
+                  <a:lnTo>
+                    <a:pt x="644602" y="58754"/>
+                  </a:lnTo>
+                  <a:lnTo>
+                    <a:pt x="572980" y="52387"/>
+                  </a:lnTo>
+                  <a:lnTo>
+                    <a:pt x="501357" y="45980"/>
+                  </a:lnTo>
+                  <a:lnTo>
+                    <a:pt x="429735" y="39534"/>
+                  </a:lnTo>
+                  <a:lnTo>
+                    <a:pt x="358112" y="33047"/>
+                  </a:lnTo>
+                  <a:lnTo>
+                    <a:pt x="286490" y="26519"/>
+                  </a:lnTo>
+                  <a:lnTo>
+                    <a:pt x="214867" y="19951"/>
+                  </a:lnTo>
+                  <a:lnTo>
+                    <a:pt x="143245" y="13342"/>
+                  </a:lnTo>
+                  <a:lnTo>
+                    <a:pt x="71622" y="6691"/>
                   </a:lnTo>
                   <a:lnTo>
                     <a:pt x="0" y="0"/>
@@ -4326,312 +4326,312 @@
           </p:nvSpPr>
           <p:spPr>
             <a:xfrm>
-              <a:off x="1172049" y="3882329"/>
-              <a:ext cx="7090630" cy="1350793"/>
+              <a:off x="1172049" y="3872904"/>
+              <a:ext cx="7090630" cy="1362642"/>
             </a:xfrm>
             <a:custGeom>
               <a:avLst/>
               <a:pathLst>
-                <a:path w="7090630" h="1350793">
+                <a:path w="7090630" h="1362642">
                   <a:moveTo>
                     <a:pt x="0" y="0"/>
                   </a:moveTo>
                   <a:lnTo>
-                    <a:pt x="71622" y="27557"/>
-                  </a:lnTo>
-                  <a:lnTo>
-                    <a:pt x="143245" y="54661"/>
-                  </a:lnTo>
-                  <a:lnTo>
-                    <a:pt x="214867" y="81319"/>
-                  </a:lnTo>
-                  <a:lnTo>
-                    <a:pt x="286490" y="107538"/>
-                  </a:lnTo>
-                  <a:lnTo>
-                    <a:pt x="358112" y="133326"/>
-                  </a:lnTo>
-                  <a:lnTo>
-                    <a:pt x="429735" y="158690"/>
-                  </a:lnTo>
-                  <a:lnTo>
-                    <a:pt x="501357" y="183636"/>
-                  </a:lnTo>
-                  <a:lnTo>
-                    <a:pt x="572980" y="208172"/>
-                  </a:lnTo>
-                  <a:lnTo>
-                    <a:pt x="644602" y="232304"/>
-                  </a:lnTo>
-                  <a:lnTo>
-                    <a:pt x="716225" y="256040"/>
-                  </a:lnTo>
-                  <a:lnTo>
-                    <a:pt x="787847" y="279384"/>
-                  </a:lnTo>
-                  <a:lnTo>
-                    <a:pt x="859470" y="302345"/>
-                  </a:lnTo>
-                  <a:lnTo>
-                    <a:pt x="931092" y="324928"/>
-                  </a:lnTo>
-                  <a:lnTo>
-                    <a:pt x="1002715" y="347139"/>
-                  </a:lnTo>
-                  <a:lnTo>
-                    <a:pt x="1074337" y="368985"/>
-                  </a:lnTo>
-                  <a:lnTo>
-                    <a:pt x="1145960" y="390471"/>
-                  </a:lnTo>
-                  <a:lnTo>
-                    <a:pt x="1217582" y="411604"/>
-                  </a:lnTo>
-                  <a:lnTo>
-                    <a:pt x="1289205" y="432390"/>
-                  </a:lnTo>
-                  <a:lnTo>
-                    <a:pt x="1360827" y="452833"/>
-                  </a:lnTo>
-                  <a:lnTo>
-                    <a:pt x="1432450" y="472940"/>
-                  </a:lnTo>
-                  <a:lnTo>
-                    <a:pt x="1504073" y="492716"/>
-                  </a:lnTo>
-                  <a:lnTo>
-                    <a:pt x="1575695" y="512166"/>
-                  </a:lnTo>
-                  <a:lnTo>
-                    <a:pt x="1647318" y="531297"/>
-                  </a:lnTo>
-                  <a:lnTo>
-                    <a:pt x="1718940" y="550113"/>
-                  </a:lnTo>
-                  <a:lnTo>
-                    <a:pt x="1790563" y="568619"/>
-                  </a:lnTo>
-                  <a:lnTo>
-                    <a:pt x="1862185" y="586821"/>
-                  </a:lnTo>
-                  <a:lnTo>
-                    <a:pt x="1933808" y="604724"/>
-                  </a:lnTo>
-                  <a:lnTo>
-                    <a:pt x="2005430" y="622331"/>
-                  </a:lnTo>
-                  <a:lnTo>
-                    <a:pt x="2077053" y="639650"/>
-                  </a:lnTo>
-                  <a:lnTo>
-                    <a:pt x="2148675" y="656683"/>
-                  </a:lnTo>
-                  <a:lnTo>
-                    <a:pt x="2220298" y="673436"/>
-                  </a:lnTo>
-                  <a:lnTo>
-                    <a:pt x="2291920" y="689913"/>
-                  </a:lnTo>
-                  <a:lnTo>
-                    <a:pt x="2363543" y="706119"/>
-                  </a:lnTo>
-                  <a:lnTo>
-                    <a:pt x="2435165" y="722059"/>
-                  </a:lnTo>
-                  <a:lnTo>
-                    <a:pt x="2506788" y="737736"/>
-                  </a:lnTo>
-                  <a:lnTo>
-                    <a:pt x="2578410" y="753156"/>
-                  </a:lnTo>
-                  <a:lnTo>
-                    <a:pt x="2650033" y="768321"/>
-                  </a:lnTo>
-                  <a:lnTo>
-                    <a:pt x="2721655" y="783238"/>
-                  </a:lnTo>
-                  <a:lnTo>
-                    <a:pt x="2793278" y="797908"/>
-                  </a:lnTo>
-                  <a:lnTo>
-                    <a:pt x="2864901" y="812338"/>
-                  </a:lnTo>
-                  <a:lnTo>
-                    <a:pt x="2936523" y="826530"/>
-                  </a:lnTo>
-                  <a:lnTo>
-                    <a:pt x="3008146" y="840488"/>
-                  </a:lnTo>
-                  <a:lnTo>
-                    <a:pt x="3079768" y="854217"/>
-                  </a:lnTo>
-                  <a:lnTo>
-                    <a:pt x="3151391" y="867720"/>
-                  </a:lnTo>
-                  <a:lnTo>
-                    <a:pt x="3223013" y="881001"/>
-                  </a:lnTo>
-                  <a:lnTo>
-                    <a:pt x="3294636" y="894063"/>
-                  </a:lnTo>
-                  <a:lnTo>
-                    <a:pt x="3366258" y="906910"/>
-                  </a:lnTo>
-                  <a:lnTo>
-                    <a:pt x="3437881" y="919546"/>
-                  </a:lnTo>
-                  <a:lnTo>
-                    <a:pt x="3509503" y="931974"/>
-                  </a:lnTo>
-                  <a:lnTo>
-                    <a:pt x="3581126" y="944198"/>
-                  </a:lnTo>
-                  <a:lnTo>
-                    <a:pt x="3652748" y="956221"/>
-                  </a:lnTo>
-                  <a:lnTo>
-                    <a:pt x="3724371" y="968045"/>
-                  </a:lnTo>
-                  <a:lnTo>
-                    <a:pt x="3795993" y="979675"/>
-                  </a:lnTo>
-                  <a:lnTo>
-                    <a:pt x="3867616" y="991114"/>
-                  </a:lnTo>
-                  <a:lnTo>
-                    <a:pt x="3939238" y="1002365"/>
-                  </a:lnTo>
-                  <a:lnTo>
-                    <a:pt x="4010861" y="1013430"/>
-                  </a:lnTo>
-                  <a:lnTo>
-                    <a:pt x="4082483" y="1024314"/>
-                  </a:lnTo>
-                  <a:lnTo>
-                    <a:pt x="4154106" y="1035018"/>
-                  </a:lnTo>
-                  <a:lnTo>
-                    <a:pt x="4225729" y="1045546"/>
-                  </a:lnTo>
-                  <a:lnTo>
-                    <a:pt x="4297351" y="1055901"/>
-                  </a:lnTo>
-                  <a:lnTo>
-                    <a:pt x="4368974" y="1066086"/>
-                  </a:lnTo>
-                  <a:lnTo>
-                    <a:pt x="4440596" y="1076103"/>
-                  </a:lnTo>
-                  <a:lnTo>
-                    <a:pt x="4512219" y="1085955"/>
-                  </a:lnTo>
-                  <a:lnTo>
-                    <a:pt x="4583841" y="1095645"/>
-                  </a:lnTo>
-                  <a:lnTo>
-                    <a:pt x="4655464" y="1105176"/>
-                  </a:lnTo>
-                  <a:lnTo>
-                    <a:pt x="4727086" y="1114550"/>
-                  </a:lnTo>
-                  <a:lnTo>
-                    <a:pt x="4798709" y="1123770"/>
-                  </a:lnTo>
-                  <a:lnTo>
-                    <a:pt x="4870331" y="1132838"/>
-                  </a:lnTo>
-                  <a:lnTo>
-                    <a:pt x="4941954" y="1141757"/>
-                  </a:lnTo>
-                  <a:lnTo>
-                    <a:pt x="5013576" y="1150529"/>
-                  </a:lnTo>
-                  <a:lnTo>
-                    <a:pt x="5085199" y="1159157"/>
-                  </a:lnTo>
-                  <a:lnTo>
-                    <a:pt x="5156821" y="1167642"/>
-                  </a:lnTo>
-                  <a:lnTo>
-                    <a:pt x="5228444" y="1175989"/>
-                  </a:lnTo>
-                  <a:lnTo>
-                    <a:pt x="5300066" y="1184197"/>
-                  </a:lnTo>
-                  <a:lnTo>
-                    <a:pt x="5371689" y="1192271"/>
-                  </a:lnTo>
-                  <a:lnTo>
-                    <a:pt x="5443311" y="1200212"/>
-                  </a:lnTo>
-                  <a:lnTo>
-                    <a:pt x="5514934" y="1208023"/>
-                  </a:lnTo>
-                  <a:lnTo>
-                    <a:pt x="5586557" y="1215704"/>
-                  </a:lnTo>
-                  <a:lnTo>
-                    <a:pt x="5658179" y="1223260"/>
-                  </a:lnTo>
-                  <a:lnTo>
-                    <a:pt x="5729802" y="1230691"/>
-                  </a:lnTo>
-                  <a:lnTo>
-                    <a:pt x="5801424" y="1238000"/>
-                  </a:lnTo>
-                  <a:lnTo>
-                    <a:pt x="5873047" y="1245188"/>
-                  </a:lnTo>
-                  <a:lnTo>
-                    <a:pt x="5944669" y="1252259"/>
-                  </a:lnTo>
-                  <a:lnTo>
-                    <a:pt x="6016292" y="1259213"/>
-                  </a:lnTo>
-                  <a:lnTo>
-                    <a:pt x="6087914" y="1266052"/>
-                  </a:lnTo>
-                  <a:lnTo>
-                    <a:pt x="6159537" y="1272779"/>
-                  </a:lnTo>
-                  <a:lnTo>
-                    <a:pt x="6231159" y="1279396"/>
-                  </a:lnTo>
-                  <a:lnTo>
-                    <a:pt x="6302782" y="1285903"/>
-                  </a:lnTo>
-                  <a:lnTo>
-                    <a:pt x="6374404" y="1292304"/>
-                  </a:lnTo>
-                  <a:lnTo>
-                    <a:pt x="6446027" y="1298599"/>
-                  </a:lnTo>
-                  <a:lnTo>
-                    <a:pt x="6517649" y="1304790"/>
-                  </a:lnTo>
-                  <a:lnTo>
-                    <a:pt x="6589272" y="1310880"/>
-                  </a:lnTo>
-                  <a:lnTo>
-                    <a:pt x="6660894" y="1316870"/>
-                  </a:lnTo>
-                  <a:lnTo>
-                    <a:pt x="6732517" y="1322761"/>
-                  </a:lnTo>
-                  <a:lnTo>
-                    <a:pt x="6804139" y="1328555"/>
-                  </a:lnTo>
-                  <a:lnTo>
-                    <a:pt x="6875762" y="1334253"/>
-                  </a:lnTo>
-                  <a:lnTo>
-                    <a:pt x="6947385" y="1339858"/>
-                  </a:lnTo>
-                  <a:lnTo>
-                    <a:pt x="7019007" y="1345371"/>
-                  </a:lnTo>
-                  <a:lnTo>
-                    <a:pt x="7090630" y="1350793"/>
+                    <a:pt x="71622" y="27931"/>
+                  </a:lnTo>
+                  <a:lnTo>
+                    <a:pt x="143245" y="55400"/>
+                  </a:lnTo>
+                  <a:lnTo>
+                    <a:pt x="214867" y="82413"/>
+                  </a:lnTo>
+                  <a:lnTo>
+                    <a:pt x="286490" y="108978"/>
+                  </a:lnTo>
+                  <a:lnTo>
+                    <a:pt x="358112" y="135103"/>
+                  </a:lnTo>
+                  <a:lnTo>
+                    <a:pt x="429735" y="160794"/>
+                  </a:lnTo>
+                  <a:lnTo>
+                    <a:pt x="501357" y="186060"/>
+                  </a:lnTo>
+                  <a:lnTo>
+                    <a:pt x="572980" y="210906"/>
+                  </a:lnTo>
+                  <a:lnTo>
+                    <a:pt x="644602" y="235340"/>
+                  </a:lnTo>
+                  <a:lnTo>
+                    <a:pt x="716225" y="259370"/>
+                  </a:lnTo>
+                  <a:lnTo>
+                    <a:pt x="787847" y="283000"/>
+                  </a:lnTo>
+                  <a:lnTo>
+                    <a:pt x="859470" y="306239"/>
+                  </a:lnTo>
+                  <a:lnTo>
+                    <a:pt x="931092" y="329092"/>
+                  </a:lnTo>
+                  <a:lnTo>
+                    <a:pt x="1002715" y="351567"/>
+                  </a:lnTo>
+                  <a:lnTo>
+                    <a:pt x="1074337" y="373669"/>
+                  </a:lnTo>
+                  <a:lnTo>
+                    <a:pt x="1145960" y="395404"/>
+                  </a:lnTo>
+                  <a:lnTo>
+                    <a:pt x="1217582" y="416779"/>
+                  </a:lnTo>
+                  <a:lnTo>
+                    <a:pt x="1289205" y="437799"/>
+                  </a:lnTo>
+                  <a:lnTo>
+                    <a:pt x="1360827" y="458471"/>
+                  </a:lnTo>
+                  <a:lnTo>
+                    <a:pt x="1432450" y="478800"/>
+                  </a:lnTo>
+                  <a:lnTo>
+                    <a:pt x="1504073" y="498791"/>
+                  </a:lnTo>
+                  <a:lnTo>
+                    <a:pt x="1575695" y="518452"/>
+                  </a:lnTo>
+                  <a:lnTo>
+                    <a:pt x="1647318" y="537786"/>
+                  </a:lnTo>
+                  <a:lnTo>
+                    <a:pt x="1718940" y="556800"/>
+                  </a:lnTo>
+                  <a:lnTo>
+                    <a:pt x="1790563" y="575498"/>
+                  </a:lnTo>
+                  <a:lnTo>
+                    <a:pt x="1862185" y="593886"/>
+                  </a:lnTo>
+                  <a:lnTo>
+                    <a:pt x="1933808" y="611969"/>
+                  </a:lnTo>
+                  <a:lnTo>
+                    <a:pt x="2005430" y="629753"/>
+                  </a:lnTo>
+                  <a:lnTo>
+                    <a:pt x="2077053" y="647241"/>
+                  </a:lnTo>
+                  <a:lnTo>
+                    <a:pt x="2148675" y="664440"/>
+                  </a:lnTo>
+                  <a:lnTo>
+                    <a:pt x="2220298" y="681353"/>
+                  </a:lnTo>
+                  <a:lnTo>
+                    <a:pt x="2291920" y="697986"/>
+                  </a:lnTo>
+                  <a:lnTo>
+                    <a:pt x="2363543" y="714343"/>
+                  </a:lnTo>
+                  <a:lnTo>
+                    <a:pt x="2435165" y="730429"/>
+                  </a:lnTo>
+                  <a:lnTo>
+                    <a:pt x="2506788" y="746248"/>
+                  </a:lnTo>
+                  <a:lnTo>
+                    <a:pt x="2578410" y="761804"/>
+                  </a:lnTo>
+                  <a:lnTo>
+                    <a:pt x="2650033" y="777103"/>
+                  </a:lnTo>
+                  <a:lnTo>
+                    <a:pt x="2721655" y="792148"/>
+                  </a:lnTo>
+                  <a:lnTo>
+                    <a:pt x="2793278" y="806944"/>
+                  </a:lnTo>
+                  <a:lnTo>
+                    <a:pt x="2864901" y="821494"/>
+                  </a:lnTo>
+                  <a:lnTo>
+                    <a:pt x="2936523" y="835802"/>
+                  </a:lnTo>
+                  <a:lnTo>
+                    <a:pt x="3008146" y="849874"/>
+                  </a:lnTo>
+                  <a:lnTo>
+                    <a:pt x="3079768" y="863712"/>
+                  </a:lnTo>
+                  <a:lnTo>
+                    <a:pt x="3151391" y="877321"/>
+                  </a:lnTo>
+                  <a:lnTo>
+                    <a:pt x="3223013" y="890704"/>
+                  </a:lnTo>
+                  <a:lnTo>
+                    <a:pt x="3294636" y="903865"/>
+                  </a:lnTo>
+                  <a:lnTo>
+                    <a:pt x="3366258" y="916808"/>
+                  </a:lnTo>
+                  <a:lnTo>
+                    <a:pt x="3437881" y="929536"/>
+                  </a:lnTo>
+                  <a:lnTo>
+                    <a:pt x="3509503" y="942053"/>
+                  </a:lnTo>
+                  <a:lnTo>
+                    <a:pt x="3581126" y="954363"/>
+                  </a:lnTo>
+                  <a:lnTo>
+                    <a:pt x="3652748" y="966468"/>
+                  </a:lnTo>
+                  <a:lnTo>
+                    <a:pt x="3724371" y="978373"/>
+                  </a:lnTo>
+                  <a:lnTo>
+                    <a:pt x="3795993" y="990080"/>
+                  </a:lnTo>
+                  <a:lnTo>
+                    <a:pt x="3867616" y="1001594"/>
+                  </a:lnTo>
+                  <a:lnTo>
+                    <a:pt x="3939238" y="1012916"/>
+                  </a:lnTo>
+                  <a:lnTo>
+                    <a:pt x="4010861" y="1024050"/>
+                  </a:lnTo>
+                  <a:lnTo>
+                    <a:pt x="4082483" y="1035000"/>
+                  </a:lnTo>
+                  <a:lnTo>
+                    <a:pt x="4154106" y="1045768"/>
+                  </a:lnTo>
+                  <a:lnTo>
+                    <a:pt x="4225729" y="1056358"/>
+                  </a:lnTo>
+                  <a:lnTo>
+                    <a:pt x="4297351" y="1066772"/>
+                  </a:lnTo>
+                  <a:lnTo>
+                    <a:pt x="4368974" y="1077013"/>
+                  </a:lnTo>
+                  <a:lnTo>
+                    <a:pt x="4440596" y="1087085"/>
+                  </a:lnTo>
+                  <a:lnTo>
+                    <a:pt x="4512219" y="1096989"/>
+                  </a:lnTo>
+                  <a:lnTo>
+                    <a:pt x="4583841" y="1106729"/>
+                  </a:lnTo>
+                  <a:lnTo>
+                    <a:pt x="4655464" y="1116308"/>
+                  </a:lnTo>
+                  <a:lnTo>
+                    <a:pt x="4727086" y="1125728"/>
+                  </a:lnTo>
+                  <a:lnTo>
+                    <a:pt x="4798709" y="1134992"/>
+                  </a:lnTo>
+                  <a:lnTo>
+                    <a:pt x="4870331" y="1144102"/>
+                  </a:lnTo>
+                  <a:lnTo>
+                    <a:pt x="4941954" y="1153061"/>
+                  </a:lnTo>
+                  <a:lnTo>
+                    <a:pt x="5013576" y="1161871"/>
+                  </a:lnTo>
+                  <a:lnTo>
+                    <a:pt x="5085199" y="1170535"/>
+                  </a:lnTo>
+                  <a:lnTo>
+                    <a:pt x="5156821" y="1179056"/>
+                  </a:lnTo>
+                  <a:lnTo>
+                    <a:pt x="5228444" y="1187435"/>
+                  </a:lnTo>
+                  <a:lnTo>
+                    <a:pt x="5300066" y="1195676"/>
+                  </a:lnTo>
+                  <a:lnTo>
+                    <a:pt x="5371689" y="1203779"/>
+                  </a:lnTo>
+                  <a:lnTo>
+                    <a:pt x="5443311" y="1211749"/>
+                  </a:lnTo>
+                  <a:lnTo>
+                    <a:pt x="5514934" y="1219586"/>
+                  </a:lnTo>
+                  <a:lnTo>
+                    <a:pt x="5586557" y="1227293"/>
+                  </a:lnTo>
+                  <a:lnTo>
+                    <a:pt x="5658179" y="1234873"/>
+                  </a:lnTo>
+                  <a:lnTo>
+                    <a:pt x="5729802" y="1242326"/>
+                  </a:lnTo>
+                  <a:lnTo>
+                    <a:pt x="5801424" y="1249656"/>
+                  </a:lnTo>
+                  <a:lnTo>
+                    <a:pt x="5873047" y="1256865"/>
+                  </a:lnTo>
+                  <a:lnTo>
+                    <a:pt x="5944669" y="1263954"/>
+                  </a:lnTo>
+                  <a:lnTo>
+                    <a:pt x="6016292" y="1270925"/>
+                  </a:lnTo>
+                  <a:lnTo>
+                    <a:pt x="6087914" y="1277781"/>
+                  </a:lnTo>
+                  <a:lnTo>
+                    <a:pt x="6159537" y="1284523"/>
+                  </a:lnTo>
+                  <a:lnTo>
+                    <a:pt x="6231159" y="1291154"/>
+                  </a:lnTo>
+                  <a:lnTo>
+                    <a:pt x="6302782" y="1297674"/>
+                  </a:lnTo>
+                  <a:lnTo>
+                    <a:pt x="6374404" y="1304086"/>
+                  </a:lnTo>
+                  <a:lnTo>
+                    <a:pt x="6446027" y="1310392"/>
+                  </a:lnTo>
+                  <a:lnTo>
+                    <a:pt x="6517649" y="1316593"/>
+                  </a:lnTo>
+                  <a:lnTo>
+                    <a:pt x="6589272" y="1322692"/>
+                  </a:lnTo>
+                  <a:lnTo>
+                    <a:pt x="6660894" y="1328689"/>
+                  </a:lnTo>
+                  <a:lnTo>
+                    <a:pt x="6732517" y="1334587"/>
+                  </a:lnTo>
+                  <a:lnTo>
+                    <a:pt x="6804139" y="1340387"/>
+                  </a:lnTo>
+                  <a:lnTo>
+                    <a:pt x="6875762" y="1346091"/>
+                  </a:lnTo>
+                  <a:lnTo>
+                    <a:pt x="6947385" y="1351701"/>
+                  </a:lnTo>
+                  <a:lnTo>
+                    <a:pt x="7019007" y="1357217"/>
+                  </a:lnTo>
+                  <a:lnTo>
+                    <a:pt x="7090630" y="1362642"/>
                   </a:lnTo>
                 </a:path>
               </a:pathLst>
@@ -5371,7 +5371,7 @@
                   <a:latin typeface="Helvetica"/>
                   <a:cs typeface="Helvetica"/>
                 </a:rPr>
-                <a:t>subHR per 10 % decline: 1.22 (1.08-1.39), p_Bonf = 0.012 (n = 6)  |  per IQR decline (Δ = 27.5 %): 1.75 (1.23-2.49)  |  IQR: [-29.1, -1.6] %</a:t>
+                <a:t>subHR per 10 % decline: 1.23 (1.08-1.40), p_Bonf = 0.011 (n = 6)  |  per IQR decline (Δ = 27.5 %): 1.75 (1.23-2.50)  |  IQR: [-29.1, -1.6] %</a:t>
               </a:r>
             </a:p>
           </p:txBody>
